--- a/assets/figures-editable/appendix-studies/a-e08.pptx
+++ b/assets/figures-editable/appendix-studies/a-e08.pptx
@@ -7,7 +7,7 @@
   <p:sldIdLst>
     <p:sldId id="256" r:id="rId7"/>
   </p:sldIdLst>
-  <p:sldSz cx="8961120" cy="5660136" type="screen4x3"/>
+  <p:sldSz cx="12191695" cy="6858000" type="screen4x3"/>
   <p:notesSz cx="6858000" cy="9144000"/>
   <p:defaultTextStyle>
     <a:defPPr>
@@ -3098,14 +3098,14 @@
       <p:grpSpPr/>
       <p:sp>
         <p:nvSpPr>
-          <p:cNvPr id="2" name="text 0" descr="sci-ppt:obj-000"/>
+          <p:cNvPr id="2" name="A-E08 text 0" descr="sci-ppt:o000"/>
           <p:cNvSpPr txBox="1"/>
           <p:nvPr/>
         </p:nvSpPr>
         <p:spPr>
           <a:xfrm>
-            <a:off x="256032" y="137160"/>
-            <a:ext cx="7315200" cy="310896"/>
+            <a:off x="274320" y="118872"/>
+            <a:ext cx="11612880" cy="340105"/>
           </a:xfrm>
           <a:prstGeom prst="rect">
             <a:avLst/>
@@ -3114,7 +3114,7 @@
           <a:effectLst/>
         </p:spPr>
         <p:txBody>
-          <a:bodyPr wrap="none" lIns="0" rIns="0" tIns="0" bIns="0" anchor="ctr">
+          <a:bodyPr wrap="none" lIns="18288" rIns="18288" tIns="18288" bIns="18288" anchor="t">
             <a:spAutoFit/>
           </a:bodyPr>
           <a:lstStyle/>
@@ -3125,113 +3125,115 @@
               </a:spcAft>
             </a:pPr>
             <a:r>
-              <a:rPr sz="1439" b="0" i="0">
+              <a:rPr sz="1900" b="1" i="0">
                 <a:solidFill>
                   <a:srgbClr val="8EDBD4"/>
                 </a:solidFill>
                 <a:latin typeface="Arial"/>
               </a:rPr>
-              <a:t>A-E08 · Physical variable map</a:t>
-            </a:r>
-          </a:p>
-        </p:txBody>
-      </p:sp>
-      <p:sp>
-        <p:nvSpPr>
-          <p:cNvPr id="3" name="ellipse 1" descr="sci-ppt:obj-001"/>
-          <p:cNvSpPr/>
-          <p:nvPr/>
-        </p:nvSpPr>
-        <p:spPr>
-          <a:xfrm>
-            <a:off x="1060704" y="914400"/>
-            <a:ext cx="1463040" cy="1463040"/>
-          </a:xfrm>
-          <a:prstGeom prst="ellipse">
-            <a:avLst/>
-          </a:prstGeom>
-          <a:noFill/>
-          <a:ln w="17780">
+              <a:t>A-E08 · Work-conjugacy and small-deformation checks</a:t>
+            </a:r>
+          </a:p>
+        </p:txBody>
+      </p:sp>
+      <p:cxnSp>
+        <p:nvCxnSpPr>
+          <p:cNvPr id="3" name="A-E08 line 1" descr="sci-ppt:o001"/>
+          <p:cNvCxnSpPr/>
+          <p:nvPr/>
+        </p:nvCxnSpPr>
+        <p:spPr>
+          <a:xfrm>
+            <a:off x="914400" y="4846320"/>
+            <a:ext cx="3291840" cy="0"/>
+          </a:xfrm>
+          <a:prstGeom prst="line">
+            <a:avLst/>
+          </a:prstGeom>
+          <a:ln w="19050">
             <a:solidFill>
               <a:srgbClr val="B4C7D2"/>
             </a:solidFill>
           </a:ln>
           <a:effectLst/>
         </p:spPr>
-        <p:txBody>
-          <a:bodyPr rtlCol="0" anchor="ctr"/>
-          <a:lstStyle/>
-          <a:p>
-            <a:pPr algn="ctr"/>
-          </a:p>
-        </p:txBody>
-      </p:sp>
-      <p:sp>
-        <p:nvSpPr>
-          <p:cNvPr id="4" name="ellipse 2" descr="sci-ppt:obj-002"/>
-          <p:cNvSpPr/>
-          <p:nvPr/>
-        </p:nvSpPr>
-        <p:spPr>
-          <a:xfrm>
-            <a:off x="1463040" y="1316736"/>
-            <a:ext cx="658368" cy="658368"/>
-          </a:xfrm>
-          <a:prstGeom prst="ellipse">
-            <a:avLst/>
-          </a:prstGeom>
-          <a:solidFill>
-            <a:srgbClr val="213E4B"/>
-          </a:solidFill>
-          <a:ln w="17780">
+      </p:cxnSp>
+      <p:cxnSp>
+        <p:nvCxnSpPr>
+          <p:cNvPr id="4" name="A-E08 line 2" descr="sci-ppt:o002"/>
+          <p:cNvCxnSpPr/>
+          <p:nvPr/>
+        </p:nvCxnSpPr>
+        <p:spPr>
+          <a:xfrm>
+            <a:off x="914400" y="1371600"/>
+            <a:ext cx="0" cy="3474720"/>
+          </a:xfrm>
+          <a:prstGeom prst="line">
+            <a:avLst/>
+          </a:prstGeom>
+          <a:ln w="19050">
             <a:solidFill>
               <a:srgbClr val="B4C7D2"/>
             </a:solidFill>
           </a:ln>
           <a:effectLst/>
         </p:spPr>
-        <p:txBody>
-          <a:bodyPr rtlCol="0" anchor="ctr"/>
-          <a:lstStyle/>
-          <a:p>
-            <a:pPr algn="ctr"/>
-          </a:p>
-        </p:txBody>
-      </p:sp>
+      </p:cxnSp>
       <p:cxnSp>
         <p:nvCxnSpPr>
-          <p:cNvPr id="5" name="arrow 3" descr="sci-ppt:obj-003"/>
+          <p:cNvPr id="5" name="A-E08 line 3" descr="sci-ppt:o003"/>
           <p:cNvCxnSpPr/>
           <p:nvPr/>
         </p:nvCxnSpPr>
         <p:spPr>
           <a:xfrm>
-            <a:off x="1792224" y="1645920"/>
-            <a:ext cx="329184" cy="0"/>
+            <a:off x="914400" y="4846320"/>
+            <a:ext cx="0" cy="64008"/>
           </a:xfrm>
           <a:prstGeom prst="line">
             <a:avLst/>
           </a:prstGeom>
-          <a:ln w="21590">
+          <a:ln w="12700">
             <a:solidFill>
-              <a:srgbClr val="8EDBD4"/>
+              <a:srgbClr val="B4C7D2"/>
             </a:solidFill>
-            <a:headEnd type="none" w="med" len="med"/>
-            <a:tailEnd type="triangle" w="med" len="med"/>
           </a:ln>
           <a:effectLst/>
         </p:spPr>
       </p:cxnSp>
-      <p:sp>
-        <p:nvSpPr>
-          <p:cNvPr id="6" name="text 4" descr="sci-ppt:obj-004"/>
+      <p:cxnSp>
+        <p:nvCxnSpPr>
+          <p:cNvPr id="6" name="A-E08 line 4" descr="sci-ppt:o004"/>
+          <p:cNvCxnSpPr/>
+          <p:nvPr/>
+        </p:nvCxnSpPr>
+        <p:spPr>
+          <a:xfrm>
+            <a:off x="914400" y="1371600"/>
+            <a:ext cx="0" cy="3474720"/>
+          </a:xfrm>
+          <a:prstGeom prst="line">
+            <a:avLst/>
+          </a:prstGeom>
+          <a:ln w="7620">
+            <a:solidFill>
+              <a:srgbClr val="2E4756"/>
+            </a:solidFill>
+          </a:ln>
+          <a:effectLst/>
+        </p:spPr>
+      </p:cxnSp>
+      <p:sp>
+        <p:nvSpPr>
+          <p:cNvPr id="7" name="A-E08 text 5" descr="sci-ppt:o005"/>
           <p:cNvSpPr txBox="1"/>
           <p:nvPr/>
         </p:nvSpPr>
         <p:spPr>
           <a:xfrm>
-            <a:off x="1755648" y="1271016"/>
-            <a:ext cx="1097280" cy="310896"/>
+            <a:off x="457200" y="4928616"/>
+            <a:ext cx="914400" cy="208407"/>
           </a:xfrm>
           <a:prstGeom prst="rect">
             <a:avLst/>
@@ -3240,7 +3242,613 @@
           <a:effectLst/>
         </p:spPr>
         <p:txBody>
-          <a:bodyPr wrap="none" lIns="0" rIns="0" tIns="0" bIns="0" anchor="ctr">
+          <a:bodyPr wrap="none" lIns="18288" rIns="18288" tIns="18288" bIns="18288" anchor="t">
+            <a:spAutoFit/>
+          </a:bodyPr>
+          <a:lstStyle/>
+          <a:p>
+            <a:pPr algn="ctr">
+              <a:spcAft>
+                <a:spcPts val="0"/>
+              </a:spcAft>
+            </a:pPr>
+            <a:r>
+              <a:rPr sz="1050" b="0" i="0">
+                <a:solidFill>
+                  <a:srgbClr val="B4C7D2"/>
+                </a:solidFill>
+                <a:latin typeface="Arial"/>
+              </a:rPr>
+              <a:t>0</a:t>
+            </a:r>
+          </a:p>
+        </p:txBody>
+      </p:sp>
+      <p:cxnSp>
+        <p:nvCxnSpPr>
+          <p:cNvPr id="8" name="A-E08 line 6" descr="sci-ppt:o006"/>
+          <p:cNvCxnSpPr/>
+          <p:nvPr/>
+        </p:nvCxnSpPr>
+        <p:spPr>
+          <a:xfrm>
+            <a:off x="2560320" y="4846320"/>
+            <a:ext cx="0" cy="64008"/>
+          </a:xfrm>
+          <a:prstGeom prst="line">
+            <a:avLst/>
+          </a:prstGeom>
+          <a:ln w="12700">
+            <a:solidFill>
+              <a:srgbClr val="B4C7D2"/>
+            </a:solidFill>
+          </a:ln>
+          <a:effectLst/>
+        </p:spPr>
+      </p:cxnSp>
+      <p:cxnSp>
+        <p:nvCxnSpPr>
+          <p:cNvPr id="9" name="A-E08 line 7" descr="sci-ppt:o007"/>
+          <p:cNvCxnSpPr/>
+          <p:nvPr/>
+        </p:nvCxnSpPr>
+        <p:spPr>
+          <a:xfrm>
+            <a:off x="2560320" y="1371600"/>
+            <a:ext cx="0" cy="3474720"/>
+          </a:xfrm>
+          <a:prstGeom prst="line">
+            <a:avLst/>
+          </a:prstGeom>
+          <a:ln w="7620">
+            <a:solidFill>
+              <a:srgbClr val="2E4756"/>
+            </a:solidFill>
+          </a:ln>
+          <a:effectLst/>
+        </p:spPr>
+      </p:cxnSp>
+      <p:sp>
+        <p:nvSpPr>
+          <p:cNvPr id="10" name="A-E08 text 8" descr="sci-ppt:o008"/>
+          <p:cNvSpPr txBox="1"/>
+          <p:nvPr/>
+        </p:nvSpPr>
+        <p:spPr>
+          <a:xfrm>
+            <a:off x="2103120" y="4928616"/>
+            <a:ext cx="914400" cy="208407"/>
+          </a:xfrm>
+          <a:prstGeom prst="rect">
+            <a:avLst/>
+          </a:prstGeom>
+          <a:noFill/>
+          <a:effectLst/>
+        </p:spPr>
+        <p:txBody>
+          <a:bodyPr wrap="none" lIns="18288" rIns="18288" tIns="18288" bIns="18288" anchor="t">
+            <a:spAutoFit/>
+          </a:bodyPr>
+          <a:lstStyle/>
+          <a:p>
+            <a:pPr algn="ctr">
+              <a:spcAft>
+                <a:spcPts val="0"/>
+              </a:spcAft>
+            </a:pPr>
+            <a:r>
+              <a:rPr sz="1050" b="0" i="0">
+                <a:solidFill>
+                  <a:srgbClr val="B4C7D2"/>
+                </a:solidFill>
+                <a:latin typeface="Arial"/>
+              </a:rPr>
+              <a:t>0.25</a:t>
+            </a:r>
+          </a:p>
+        </p:txBody>
+      </p:sp>
+      <p:cxnSp>
+        <p:nvCxnSpPr>
+          <p:cNvPr id="11" name="A-E08 line 9" descr="sci-ppt:o009"/>
+          <p:cNvCxnSpPr/>
+          <p:nvPr/>
+        </p:nvCxnSpPr>
+        <p:spPr>
+          <a:xfrm>
+            <a:off x="4206240" y="4846320"/>
+            <a:ext cx="0" cy="64008"/>
+          </a:xfrm>
+          <a:prstGeom prst="line">
+            <a:avLst/>
+          </a:prstGeom>
+          <a:ln w="12700">
+            <a:solidFill>
+              <a:srgbClr val="B4C7D2"/>
+            </a:solidFill>
+          </a:ln>
+          <a:effectLst/>
+        </p:spPr>
+      </p:cxnSp>
+      <p:cxnSp>
+        <p:nvCxnSpPr>
+          <p:cNvPr id="12" name="A-E08 line 10" descr="sci-ppt:o010"/>
+          <p:cNvCxnSpPr/>
+          <p:nvPr/>
+        </p:nvCxnSpPr>
+        <p:spPr>
+          <a:xfrm>
+            <a:off x="4206240" y="1371600"/>
+            <a:ext cx="0" cy="3474720"/>
+          </a:xfrm>
+          <a:prstGeom prst="line">
+            <a:avLst/>
+          </a:prstGeom>
+          <a:ln w="7620">
+            <a:solidFill>
+              <a:srgbClr val="2E4756"/>
+            </a:solidFill>
+          </a:ln>
+          <a:effectLst/>
+        </p:spPr>
+      </p:cxnSp>
+      <p:sp>
+        <p:nvSpPr>
+          <p:cNvPr id="13" name="A-E08 text 11" descr="sci-ppt:o011"/>
+          <p:cNvSpPr txBox="1"/>
+          <p:nvPr/>
+        </p:nvSpPr>
+        <p:spPr>
+          <a:xfrm>
+            <a:off x="3749039" y="4928616"/>
+            <a:ext cx="914400" cy="208407"/>
+          </a:xfrm>
+          <a:prstGeom prst="rect">
+            <a:avLst/>
+          </a:prstGeom>
+          <a:noFill/>
+          <a:effectLst/>
+        </p:spPr>
+        <p:txBody>
+          <a:bodyPr wrap="none" lIns="18288" rIns="18288" tIns="18288" bIns="18288" anchor="t">
+            <a:spAutoFit/>
+          </a:bodyPr>
+          <a:lstStyle/>
+          <a:p>
+            <a:pPr algn="ctr">
+              <a:spcAft>
+                <a:spcPts val="0"/>
+              </a:spcAft>
+            </a:pPr>
+            <a:r>
+              <a:rPr sz="1050" b="0" i="0">
+                <a:solidFill>
+                  <a:srgbClr val="B4C7D2"/>
+                </a:solidFill>
+                <a:latin typeface="Arial"/>
+              </a:rPr>
+              <a:t>0.5</a:t>
+            </a:r>
+          </a:p>
+        </p:txBody>
+      </p:sp>
+      <p:cxnSp>
+        <p:nvCxnSpPr>
+          <p:cNvPr id="14" name="A-E08 line 12" descr="sci-ppt:o012"/>
+          <p:cNvCxnSpPr/>
+          <p:nvPr/>
+        </p:nvCxnSpPr>
+        <p:spPr>
+          <a:xfrm>
+            <a:off x="850392" y="4846320"/>
+            <a:ext cx="64008" cy="0"/>
+          </a:xfrm>
+          <a:prstGeom prst="line">
+            <a:avLst/>
+          </a:prstGeom>
+          <a:ln w="12700">
+            <a:solidFill>
+              <a:srgbClr val="B4C7D2"/>
+            </a:solidFill>
+          </a:ln>
+          <a:effectLst/>
+        </p:spPr>
+      </p:cxnSp>
+      <p:cxnSp>
+        <p:nvCxnSpPr>
+          <p:cNvPr id="15" name="A-E08 line 13" descr="sci-ppt:o013"/>
+          <p:cNvCxnSpPr/>
+          <p:nvPr/>
+        </p:nvCxnSpPr>
+        <p:spPr>
+          <a:xfrm>
+            <a:off x="850392" y="3977639"/>
+            <a:ext cx="64008" cy="0"/>
+          </a:xfrm>
+          <a:prstGeom prst="line">
+            <a:avLst/>
+          </a:prstGeom>
+          <a:ln w="12700">
+            <a:solidFill>
+              <a:srgbClr val="B4C7D2"/>
+            </a:solidFill>
+          </a:ln>
+          <a:effectLst/>
+        </p:spPr>
+      </p:cxnSp>
+      <p:cxnSp>
+        <p:nvCxnSpPr>
+          <p:cNvPr id="16" name="A-E08 line 14" descr="sci-ppt:o014"/>
+          <p:cNvCxnSpPr/>
+          <p:nvPr/>
+        </p:nvCxnSpPr>
+        <p:spPr>
+          <a:xfrm>
+            <a:off x="914400" y="3977639"/>
+            <a:ext cx="3291840" cy="0"/>
+          </a:xfrm>
+          <a:prstGeom prst="line">
+            <a:avLst/>
+          </a:prstGeom>
+          <a:ln w="7620">
+            <a:solidFill>
+              <a:srgbClr val="2E4756"/>
+            </a:solidFill>
+          </a:ln>
+          <a:effectLst/>
+        </p:spPr>
+      </p:cxnSp>
+      <p:sp>
+        <p:nvSpPr>
+          <p:cNvPr id="17" name="A-E08 text 15" descr="sci-ppt:o015"/>
+          <p:cNvSpPr txBox="1"/>
+          <p:nvPr/>
+        </p:nvSpPr>
+        <p:spPr>
+          <a:xfrm>
+            <a:off x="45720" y="3895344"/>
+            <a:ext cx="777240" cy="208407"/>
+          </a:xfrm>
+          <a:prstGeom prst="rect">
+            <a:avLst/>
+          </a:prstGeom>
+          <a:noFill/>
+          <a:effectLst/>
+        </p:spPr>
+        <p:txBody>
+          <a:bodyPr wrap="none" lIns="18288" rIns="18288" tIns="18288" bIns="18288" anchor="t">
+            <a:spAutoFit/>
+          </a:bodyPr>
+          <a:lstStyle/>
+          <a:p>
+            <a:pPr algn="r">
+              <a:spcAft>
+                <a:spcPts val="0"/>
+              </a:spcAft>
+            </a:pPr>
+            <a:r>
+              <a:rPr sz="1050" b="0" i="0">
+                <a:solidFill>
+                  <a:srgbClr val="B4C7D2"/>
+                </a:solidFill>
+                <a:latin typeface="Arial"/>
+              </a:rPr>
+              <a:t>10</a:t>
+            </a:r>
+          </a:p>
+        </p:txBody>
+      </p:sp>
+      <p:cxnSp>
+        <p:nvCxnSpPr>
+          <p:cNvPr id="18" name="A-E08 line 16" descr="sci-ppt:o016"/>
+          <p:cNvCxnSpPr/>
+          <p:nvPr/>
+        </p:nvCxnSpPr>
+        <p:spPr>
+          <a:xfrm>
+            <a:off x="850392" y="3108960"/>
+            <a:ext cx="64008" cy="0"/>
+          </a:xfrm>
+          <a:prstGeom prst="line">
+            <a:avLst/>
+          </a:prstGeom>
+          <a:ln w="12700">
+            <a:solidFill>
+              <a:srgbClr val="B4C7D2"/>
+            </a:solidFill>
+          </a:ln>
+          <a:effectLst/>
+        </p:spPr>
+      </p:cxnSp>
+      <p:cxnSp>
+        <p:nvCxnSpPr>
+          <p:cNvPr id="19" name="A-E08 line 17" descr="sci-ppt:o017"/>
+          <p:cNvCxnSpPr/>
+          <p:nvPr/>
+        </p:nvCxnSpPr>
+        <p:spPr>
+          <a:xfrm>
+            <a:off x="914400" y="3108960"/>
+            <a:ext cx="3291840" cy="0"/>
+          </a:xfrm>
+          <a:prstGeom prst="line">
+            <a:avLst/>
+          </a:prstGeom>
+          <a:ln w="7620">
+            <a:solidFill>
+              <a:srgbClr val="2E4756"/>
+            </a:solidFill>
+          </a:ln>
+          <a:effectLst/>
+        </p:spPr>
+      </p:cxnSp>
+      <p:sp>
+        <p:nvSpPr>
+          <p:cNvPr id="20" name="A-E08 text 18" descr="sci-ppt:o018"/>
+          <p:cNvSpPr txBox="1"/>
+          <p:nvPr/>
+        </p:nvSpPr>
+        <p:spPr>
+          <a:xfrm>
+            <a:off x="45720" y="3026664"/>
+            <a:ext cx="777240" cy="208407"/>
+          </a:xfrm>
+          <a:prstGeom prst="rect">
+            <a:avLst/>
+          </a:prstGeom>
+          <a:noFill/>
+          <a:effectLst/>
+        </p:spPr>
+        <p:txBody>
+          <a:bodyPr wrap="none" lIns="18288" rIns="18288" tIns="18288" bIns="18288" anchor="t">
+            <a:spAutoFit/>
+          </a:bodyPr>
+          <a:lstStyle/>
+          <a:p>
+            <a:pPr algn="r">
+              <a:spcAft>
+                <a:spcPts val="0"/>
+              </a:spcAft>
+            </a:pPr>
+            <a:r>
+              <a:rPr sz="1050" b="0" i="0">
+                <a:solidFill>
+                  <a:srgbClr val="B4C7D2"/>
+                </a:solidFill>
+                <a:latin typeface="Arial"/>
+              </a:rPr>
+              <a:t>20</a:t>
+            </a:r>
+          </a:p>
+        </p:txBody>
+      </p:sp>
+      <p:cxnSp>
+        <p:nvCxnSpPr>
+          <p:cNvPr id="21" name="A-E08 line 19" descr="sci-ppt:o019"/>
+          <p:cNvCxnSpPr/>
+          <p:nvPr/>
+        </p:nvCxnSpPr>
+        <p:spPr>
+          <a:xfrm>
+            <a:off x="850392" y="2240280"/>
+            <a:ext cx="64008" cy="0"/>
+          </a:xfrm>
+          <a:prstGeom prst="line">
+            <a:avLst/>
+          </a:prstGeom>
+          <a:ln w="12700">
+            <a:solidFill>
+              <a:srgbClr val="B4C7D2"/>
+            </a:solidFill>
+          </a:ln>
+          <a:effectLst/>
+        </p:spPr>
+      </p:cxnSp>
+      <p:cxnSp>
+        <p:nvCxnSpPr>
+          <p:cNvPr id="22" name="A-E08 line 20" descr="sci-ppt:o020"/>
+          <p:cNvCxnSpPr/>
+          <p:nvPr/>
+        </p:nvCxnSpPr>
+        <p:spPr>
+          <a:xfrm>
+            <a:off x="914400" y="2240280"/>
+            <a:ext cx="3291840" cy="0"/>
+          </a:xfrm>
+          <a:prstGeom prst="line">
+            <a:avLst/>
+          </a:prstGeom>
+          <a:ln w="7620">
+            <a:solidFill>
+              <a:srgbClr val="2E4756"/>
+            </a:solidFill>
+          </a:ln>
+          <a:effectLst/>
+        </p:spPr>
+      </p:cxnSp>
+      <p:sp>
+        <p:nvSpPr>
+          <p:cNvPr id="23" name="A-E08 text 21" descr="sci-ppt:o021"/>
+          <p:cNvSpPr txBox="1"/>
+          <p:nvPr/>
+        </p:nvSpPr>
+        <p:spPr>
+          <a:xfrm>
+            <a:off x="45720" y="2157984"/>
+            <a:ext cx="777240" cy="208407"/>
+          </a:xfrm>
+          <a:prstGeom prst="rect">
+            <a:avLst/>
+          </a:prstGeom>
+          <a:noFill/>
+          <a:effectLst/>
+        </p:spPr>
+        <p:txBody>
+          <a:bodyPr wrap="none" lIns="18288" rIns="18288" tIns="18288" bIns="18288" anchor="t">
+            <a:spAutoFit/>
+          </a:bodyPr>
+          <a:lstStyle/>
+          <a:p>
+            <a:pPr algn="r">
+              <a:spcAft>
+                <a:spcPts val="0"/>
+              </a:spcAft>
+            </a:pPr>
+            <a:r>
+              <a:rPr sz="1050" b="0" i="0">
+                <a:solidFill>
+                  <a:srgbClr val="B4C7D2"/>
+                </a:solidFill>
+                <a:latin typeface="Arial"/>
+              </a:rPr>
+              <a:t>30</a:t>
+            </a:r>
+          </a:p>
+        </p:txBody>
+      </p:sp>
+      <p:cxnSp>
+        <p:nvCxnSpPr>
+          <p:cNvPr id="24" name="A-E08 line 22" descr="sci-ppt:o022"/>
+          <p:cNvCxnSpPr/>
+          <p:nvPr/>
+        </p:nvCxnSpPr>
+        <p:spPr>
+          <a:xfrm>
+            <a:off x="850392" y="1371600"/>
+            <a:ext cx="64008" cy="0"/>
+          </a:xfrm>
+          <a:prstGeom prst="line">
+            <a:avLst/>
+          </a:prstGeom>
+          <a:ln w="12700">
+            <a:solidFill>
+              <a:srgbClr val="B4C7D2"/>
+            </a:solidFill>
+          </a:ln>
+          <a:effectLst/>
+        </p:spPr>
+      </p:cxnSp>
+      <p:cxnSp>
+        <p:nvCxnSpPr>
+          <p:cNvPr id="25" name="A-E08 line 23" descr="sci-ppt:o023"/>
+          <p:cNvCxnSpPr/>
+          <p:nvPr/>
+        </p:nvCxnSpPr>
+        <p:spPr>
+          <a:xfrm>
+            <a:off x="914400" y="1371600"/>
+            <a:ext cx="3291840" cy="0"/>
+          </a:xfrm>
+          <a:prstGeom prst="line">
+            <a:avLst/>
+          </a:prstGeom>
+          <a:ln w="7620">
+            <a:solidFill>
+              <a:srgbClr val="2E4756"/>
+            </a:solidFill>
+          </a:ln>
+          <a:effectLst/>
+        </p:spPr>
+      </p:cxnSp>
+      <p:sp>
+        <p:nvSpPr>
+          <p:cNvPr id="26" name="A-E08 text 24" descr="sci-ppt:o024"/>
+          <p:cNvSpPr txBox="1"/>
+          <p:nvPr/>
+        </p:nvSpPr>
+        <p:spPr>
+          <a:xfrm>
+            <a:off x="45720" y="1289304"/>
+            <a:ext cx="777240" cy="208407"/>
+          </a:xfrm>
+          <a:prstGeom prst="rect">
+            <a:avLst/>
+          </a:prstGeom>
+          <a:noFill/>
+          <a:effectLst/>
+        </p:spPr>
+        <p:txBody>
+          <a:bodyPr wrap="none" lIns="18288" rIns="18288" tIns="18288" bIns="18288" anchor="t">
+            <a:spAutoFit/>
+          </a:bodyPr>
+          <a:lstStyle/>
+          <a:p>
+            <a:pPr algn="r">
+              <a:spcAft>
+                <a:spcPts val="0"/>
+              </a:spcAft>
+            </a:pPr>
+            <a:r>
+              <a:rPr sz="1050" b="0" i="0">
+                <a:solidFill>
+                  <a:srgbClr val="B4C7D2"/>
+                </a:solidFill>
+                <a:latin typeface="Arial"/>
+              </a:rPr>
+              <a:t>40</a:t>
+            </a:r>
+          </a:p>
+        </p:txBody>
+      </p:sp>
+      <p:sp>
+        <p:nvSpPr>
+          <p:cNvPr id="27" name="A-E08 text 25" descr="sci-ppt:o025"/>
+          <p:cNvSpPr txBox="1"/>
+          <p:nvPr/>
+        </p:nvSpPr>
+        <p:spPr>
+          <a:xfrm>
+            <a:off x="914400" y="5129783"/>
+            <a:ext cx="3291840" cy="231648"/>
+          </a:xfrm>
+          <a:prstGeom prst="rect">
+            <a:avLst/>
+          </a:prstGeom>
+          <a:noFill/>
+          <a:effectLst/>
+        </p:spPr>
+        <p:txBody>
+          <a:bodyPr wrap="none" lIns="18288" rIns="18288" tIns="18288" bIns="18288" anchor="t">
+            <a:spAutoFit/>
+          </a:bodyPr>
+          <a:lstStyle/>
+          <a:p>
+            <a:pPr algn="ctr">
+              <a:spcAft>
+                <a:spcPts val="0"/>
+              </a:spcAft>
+            </a:pPr>
+            <a:r>
+              <a:rPr sz="1200" b="0" i="0">
+                <a:solidFill>
+                  <a:srgbClr val="E7F0F3"/>
+                </a:solidFill>
+                <a:latin typeface="Arial"/>
+              </a:rPr>
+              <a:t>δR / R_ref</a:t>
+            </a:r>
+          </a:p>
+        </p:txBody>
+      </p:sp>
+      <p:sp>
+        <p:nvSpPr>
+          <p:cNvPr id="28" name="A-E08 text 26" descr="sci-ppt:o026"/>
+          <p:cNvSpPr txBox="1"/>
+          <p:nvPr/>
+        </p:nvSpPr>
+        <p:spPr>
+          <a:xfrm>
+            <a:off x="365760" y="1024128"/>
+            <a:ext cx="3291840" cy="231648"/>
+          </a:xfrm>
+          <a:prstGeom prst="rect">
+            <a:avLst/>
+          </a:prstGeom>
+          <a:noFill/>
+          <a:effectLst/>
+        </p:spPr>
+        <p:txBody>
+          <a:bodyPr wrap="none" lIns="18288" rIns="18288" tIns="18288" bIns="18288" anchor="t">
             <a:spAutoFit/>
           </a:bodyPr>
           <a:lstStyle/>
@@ -3251,51 +3859,704 @@
               </a:spcAft>
             </a:pPr>
             <a:r>
-              <a:rPr sz="1296" b="0" i="0">
+              <a:rPr sz="1200" b="0" i="0">
                 <a:solidFill>
                   <a:srgbClr val="E7F0F3"/>
                 </a:solidFill>
                 <a:latin typeface="Arial"/>
               </a:rPr>
-              <a:t>Rref</a:t>
-            </a:r>
-          </a:p>
-        </p:txBody>
-      </p:sp>
-      <p:cxnSp>
-        <p:nvCxnSpPr>
-          <p:cNvPr id="7" name="arrow 5" descr="sci-ppt:obj-005"/>
-          <p:cNvCxnSpPr/>
-          <p:nvPr/>
-        </p:nvCxnSpPr>
-        <p:spPr>
-          <a:xfrm>
-            <a:off x="1792224" y="1645920"/>
-            <a:ext cx="517262" cy="517262"/>
-          </a:xfrm>
-          <a:prstGeom prst="line">
-            <a:avLst/>
-          </a:prstGeom>
-          <a:ln w="21590">
+              <a:t>pₑₗ  (kPa)</a:t>
+            </a:r>
+          </a:p>
+        </p:txBody>
+      </p:sp>
+      <p:sp>
+        <p:nvSpPr>
+          <p:cNvPr id="29" name="A-E08 polygon 27" descr="sci-ppt:o027"/>
+          <p:cNvSpPr/>
+          <p:nvPr/>
+        </p:nvSpPr>
+        <p:spPr>
+          <a:xfrm>
+            <a:off x="914400" y="2990991"/>
+            <a:ext cx="3291840" cy="1855329"/>
+          </a:xfrm>
+          <a:custGeom>
+            <a:avLst/>
+            <a:gdLst/>
+            <a:ahLst/>
+            <a:cxnLst/>
+            <a:rect l="l" t="t" r="r" b="b"/>
+            <a:pathLst>
+              <a:path w="3291840" h="1855329">
+                <a:moveTo>
+                  <a:pt x="0" y="1855329"/>
+                </a:moveTo>
+                <a:lnTo>
+                  <a:pt x="33250" y="1820538"/>
+                </a:lnTo>
+                <a:lnTo>
+                  <a:pt x="66501" y="1786352"/>
+                </a:lnTo>
+                <a:lnTo>
+                  <a:pt x="99752" y="1752755"/>
+                </a:lnTo>
+                <a:lnTo>
+                  <a:pt x="133003" y="1719733"/>
+                </a:lnTo>
+                <a:lnTo>
+                  <a:pt x="166254" y="1687270"/>
+                </a:lnTo>
+                <a:lnTo>
+                  <a:pt x="199505" y="1655354"/>
+                </a:lnTo>
+                <a:lnTo>
+                  <a:pt x="232756" y="1623971"/>
+                </a:lnTo>
+                <a:lnTo>
+                  <a:pt x="266007" y="1593106"/>
+                </a:lnTo>
+                <a:lnTo>
+                  <a:pt x="299258" y="1562749"/>
+                </a:lnTo>
+                <a:lnTo>
+                  <a:pt x="332509" y="1532886"/>
+                </a:lnTo>
+                <a:lnTo>
+                  <a:pt x="365760" y="1503506"/>
+                </a:lnTo>
+                <a:lnTo>
+                  <a:pt x="399010" y="1474598"/>
+                </a:lnTo>
+                <a:lnTo>
+                  <a:pt x="432261" y="1446149"/>
+                </a:lnTo>
+                <a:lnTo>
+                  <a:pt x="465512" y="1418149"/>
+                </a:lnTo>
+                <a:lnTo>
+                  <a:pt x="498763" y="1390588"/>
+                </a:lnTo>
+                <a:lnTo>
+                  <a:pt x="532014" y="1363455"/>
+                </a:lnTo>
+                <a:lnTo>
+                  <a:pt x="565265" y="1336740"/>
+                </a:lnTo>
+                <a:lnTo>
+                  <a:pt x="598516" y="1310435"/>
+                </a:lnTo>
+                <a:lnTo>
+                  <a:pt x="631767" y="1284528"/>
+                </a:lnTo>
+                <a:lnTo>
+                  <a:pt x="665018" y="1259013"/>
+                </a:lnTo>
+                <a:lnTo>
+                  <a:pt x="698269" y="1233879"/>
+                </a:lnTo>
+                <a:lnTo>
+                  <a:pt x="731520" y="1209117"/>
+                </a:lnTo>
+                <a:lnTo>
+                  <a:pt x="764770" y="1184721"/>
+                </a:lnTo>
+                <a:lnTo>
+                  <a:pt x="798021" y="1160682"/>
+                </a:lnTo>
+                <a:lnTo>
+                  <a:pt x="831272" y="1136991"/>
+                </a:lnTo>
+                <a:lnTo>
+                  <a:pt x="864523" y="1113641"/>
+                </a:lnTo>
+                <a:lnTo>
+                  <a:pt x="897774" y="1090625"/>
+                </a:lnTo>
+                <a:lnTo>
+                  <a:pt x="931025" y="1067936"/>
+                </a:lnTo>
+                <a:lnTo>
+                  <a:pt x="964276" y="1045567"/>
+                </a:lnTo>
+                <a:lnTo>
+                  <a:pt x="997527" y="1023510"/>
+                </a:lnTo>
+                <a:lnTo>
+                  <a:pt x="1030778" y="1001760"/>
+                </a:lnTo>
+                <a:lnTo>
+                  <a:pt x="1064029" y="980309"/>
+                </a:lnTo>
+                <a:lnTo>
+                  <a:pt x="1097280" y="959152"/>
+                </a:lnTo>
+                <a:lnTo>
+                  <a:pt x="1130530" y="938282"/>
+                </a:lnTo>
+                <a:lnTo>
+                  <a:pt x="1163781" y="917693"/>
+                </a:lnTo>
+                <a:lnTo>
+                  <a:pt x="1197032" y="897381"/>
+                </a:lnTo>
+                <a:lnTo>
+                  <a:pt x="1230283" y="877338"/>
+                </a:lnTo>
+                <a:lnTo>
+                  <a:pt x="1263534" y="857560"/>
+                </a:lnTo>
+                <a:lnTo>
+                  <a:pt x="1296785" y="838041"/>
+                </a:lnTo>
+                <a:lnTo>
+                  <a:pt x="1330036" y="818776"/>
+                </a:lnTo>
+                <a:lnTo>
+                  <a:pt x="1363287" y="799761"/>
+                </a:lnTo>
+                <a:lnTo>
+                  <a:pt x="1396538" y="780989"/>
+                </a:lnTo>
+                <a:lnTo>
+                  <a:pt x="1429789" y="762456"/>
+                </a:lnTo>
+                <a:lnTo>
+                  <a:pt x="1463040" y="744159"/>
+                </a:lnTo>
+                <a:lnTo>
+                  <a:pt x="1496290" y="726091"/>
+                </a:lnTo>
+                <a:lnTo>
+                  <a:pt x="1529541" y="708249"/>
+                </a:lnTo>
+                <a:lnTo>
+                  <a:pt x="1562792" y="690628"/>
+                </a:lnTo>
+                <a:lnTo>
+                  <a:pt x="1596043" y="673224"/>
+                </a:lnTo>
+                <a:lnTo>
+                  <a:pt x="1629294" y="656033"/>
+                </a:lnTo>
+                <a:lnTo>
+                  <a:pt x="1662545" y="639051"/>
+                </a:lnTo>
+                <a:lnTo>
+                  <a:pt x="1695796" y="622274"/>
+                </a:lnTo>
+                <a:lnTo>
+                  <a:pt x="1729047" y="605698"/>
+                </a:lnTo>
+                <a:lnTo>
+                  <a:pt x="1762298" y="589319"/>
+                </a:lnTo>
+                <a:lnTo>
+                  <a:pt x="1795549" y="573135"/>
+                </a:lnTo>
+                <a:lnTo>
+                  <a:pt x="1828800" y="557140"/>
+                </a:lnTo>
+                <a:lnTo>
+                  <a:pt x="1862050" y="541333"/>
+                </a:lnTo>
+                <a:lnTo>
+                  <a:pt x="1895301" y="525708"/>
+                </a:lnTo>
+                <a:lnTo>
+                  <a:pt x="1928552" y="510264"/>
+                </a:lnTo>
+                <a:lnTo>
+                  <a:pt x="1961803" y="494997"/>
+                </a:lnTo>
+                <a:lnTo>
+                  <a:pt x="1995054" y="479904"/>
+                </a:lnTo>
+                <a:lnTo>
+                  <a:pt x="2028305" y="464981"/>
+                </a:lnTo>
+                <a:lnTo>
+                  <a:pt x="2061556" y="450226"/>
+                </a:lnTo>
+                <a:lnTo>
+                  <a:pt x="2094807" y="435635"/>
+                </a:lnTo>
+                <a:lnTo>
+                  <a:pt x="2128058" y="421207"/>
+                </a:lnTo>
+                <a:lnTo>
+                  <a:pt x="2161309" y="406937"/>
+                </a:lnTo>
+                <a:lnTo>
+                  <a:pt x="2194560" y="392824"/>
+                </a:lnTo>
+                <a:lnTo>
+                  <a:pt x="2227810" y="378865"/>
+                </a:lnTo>
+                <a:lnTo>
+                  <a:pt x="2261061" y="365056"/>
+                </a:lnTo>
+                <a:lnTo>
+                  <a:pt x="2294312" y="351397"/>
+                </a:lnTo>
+                <a:lnTo>
+                  <a:pt x="2327563" y="337883"/>
+                </a:lnTo>
+                <a:lnTo>
+                  <a:pt x="2360814" y="324512"/>
+                </a:lnTo>
+                <a:lnTo>
+                  <a:pt x="2394065" y="311283"/>
+                </a:lnTo>
+                <a:lnTo>
+                  <a:pt x="2427316" y="298193"/>
+                </a:lnTo>
+                <a:lnTo>
+                  <a:pt x="2460567" y="285239"/>
+                </a:lnTo>
+                <a:lnTo>
+                  <a:pt x="2493818" y="272419"/>
+                </a:lnTo>
+                <a:lnTo>
+                  <a:pt x="2527069" y="259732"/>
+                </a:lnTo>
+                <a:lnTo>
+                  <a:pt x="2560320" y="247175"/>
+                </a:lnTo>
+                <a:lnTo>
+                  <a:pt x="2593570" y="234745"/>
+                </a:lnTo>
+                <a:lnTo>
+                  <a:pt x="2626821" y="222442"/>
+                </a:lnTo>
+                <a:lnTo>
+                  <a:pt x="2660072" y="210262"/>
+                </a:lnTo>
+                <a:lnTo>
+                  <a:pt x="2693323" y="198204"/>
+                </a:lnTo>
+                <a:lnTo>
+                  <a:pt x="2726574" y="186266"/>
+                </a:lnTo>
+                <a:lnTo>
+                  <a:pt x="2759825" y="174446"/>
+                </a:lnTo>
+                <a:lnTo>
+                  <a:pt x="2793076" y="162743"/>
+                </a:lnTo>
+                <a:lnTo>
+                  <a:pt x="2826327" y="151154"/>
+                </a:lnTo>
+                <a:lnTo>
+                  <a:pt x="2859578" y="139678"/>
+                </a:lnTo>
+                <a:lnTo>
+                  <a:pt x="2892829" y="128312"/>
+                </a:lnTo>
+                <a:lnTo>
+                  <a:pt x="2926080" y="117056"/>
+                </a:lnTo>
+                <a:lnTo>
+                  <a:pt x="2959330" y="105908"/>
+                </a:lnTo>
+                <a:lnTo>
+                  <a:pt x="2992581" y="94865"/>
+                </a:lnTo>
+                <a:lnTo>
+                  <a:pt x="3025832" y="83927"/>
+                </a:lnTo>
+                <a:lnTo>
+                  <a:pt x="3059083" y="73092"/>
+                </a:lnTo>
+                <a:lnTo>
+                  <a:pt x="3092334" y="62358"/>
+                </a:lnTo>
+                <a:lnTo>
+                  <a:pt x="3125585" y="51724"/>
+                </a:lnTo>
+                <a:lnTo>
+                  <a:pt x="3158836" y="41188"/>
+                </a:lnTo>
+                <a:lnTo>
+                  <a:pt x="3192087" y="30749"/>
+                </a:lnTo>
+                <a:lnTo>
+                  <a:pt x="3225338" y="20405"/>
+                </a:lnTo>
+                <a:lnTo>
+                  <a:pt x="3258589" y="10156"/>
+                </a:lnTo>
+                <a:lnTo>
+                  <a:pt x="3291840" y="0"/>
+                </a:lnTo>
+              </a:path>
+            </a:pathLst>
+          </a:custGeom>
+          <a:noFill/>
+          <a:ln w="38100">
             <a:solidFill>
               <a:srgbClr val="8EDBD4"/>
             </a:solidFill>
-            <a:headEnd type="none" w="med" len="med"/>
-            <a:tailEnd type="triangle" w="med" len="med"/>
           </a:ln>
           <a:effectLst/>
         </p:spPr>
-      </p:cxnSp>
-      <p:sp>
-        <p:nvSpPr>
-          <p:cNvPr id="8" name="text 6" descr="sci-ppt:obj-006"/>
+        <p:txBody>
+          <a:bodyPr rtlCol="0" anchor="ctr"/>
+          <a:lstStyle/>
+          <a:p>
+            <a:pPr algn="ctr"/>
+          </a:p>
+        </p:txBody>
+      </p:sp>
+      <p:sp>
+        <p:nvSpPr>
+          <p:cNvPr id="30" name="A-E08 polygon 28" descr="sci-ppt:o028"/>
+          <p:cNvSpPr/>
+          <p:nvPr/>
+        </p:nvSpPr>
+        <p:spPr>
+          <a:xfrm>
+            <a:off x="914400" y="1371600"/>
+            <a:ext cx="3291840" cy="3474720"/>
+          </a:xfrm>
+          <a:custGeom>
+            <a:avLst/>
+            <a:gdLst/>
+            <a:ahLst/>
+            <a:cxnLst/>
+            <a:rect l="l" t="t" r="r" b="b"/>
+            <a:pathLst>
+              <a:path w="3291840" h="3474720">
+                <a:moveTo>
+                  <a:pt x="0" y="3474720"/>
+                </a:moveTo>
+                <a:lnTo>
+                  <a:pt x="33250" y="3439621"/>
+                </a:lnTo>
+                <a:lnTo>
+                  <a:pt x="66501" y="3404523"/>
+                </a:lnTo>
+                <a:lnTo>
+                  <a:pt x="99752" y="3369425"/>
+                </a:lnTo>
+                <a:lnTo>
+                  <a:pt x="133003" y="3334327"/>
+                </a:lnTo>
+                <a:lnTo>
+                  <a:pt x="166254" y="3299229"/>
+                </a:lnTo>
+                <a:lnTo>
+                  <a:pt x="199505" y="3264130"/>
+                </a:lnTo>
+                <a:lnTo>
+                  <a:pt x="232756" y="3229032"/>
+                </a:lnTo>
+                <a:lnTo>
+                  <a:pt x="266007" y="3193934"/>
+                </a:lnTo>
+                <a:lnTo>
+                  <a:pt x="299258" y="3158836"/>
+                </a:lnTo>
+                <a:lnTo>
+                  <a:pt x="332509" y="3123738"/>
+                </a:lnTo>
+                <a:lnTo>
+                  <a:pt x="365760" y="3088640"/>
+                </a:lnTo>
+                <a:lnTo>
+                  <a:pt x="399010" y="3053541"/>
+                </a:lnTo>
+                <a:lnTo>
+                  <a:pt x="432261" y="3018443"/>
+                </a:lnTo>
+                <a:lnTo>
+                  <a:pt x="465512" y="2983345"/>
+                </a:lnTo>
+                <a:lnTo>
+                  <a:pt x="498763" y="2948247"/>
+                </a:lnTo>
+                <a:lnTo>
+                  <a:pt x="532014" y="2913149"/>
+                </a:lnTo>
+                <a:lnTo>
+                  <a:pt x="565265" y="2878050"/>
+                </a:lnTo>
+                <a:lnTo>
+                  <a:pt x="598516" y="2842952"/>
+                </a:lnTo>
+                <a:lnTo>
+                  <a:pt x="631767" y="2807854"/>
+                </a:lnTo>
+                <a:lnTo>
+                  <a:pt x="665018" y="2772756"/>
+                </a:lnTo>
+                <a:lnTo>
+                  <a:pt x="698269" y="2737658"/>
+                </a:lnTo>
+                <a:lnTo>
+                  <a:pt x="731520" y="2702560"/>
+                </a:lnTo>
+                <a:lnTo>
+                  <a:pt x="764770" y="2667461"/>
+                </a:lnTo>
+                <a:lnTo>
+                  <a:pt x="798021" y="2632363"/>
+                </a:lnTo>
+                <a:lnTo>
+                  <a:pt x="831272" y="2597265"/>
+                </a:lnTo>
+                <a:lnTo>
+                  <a:pt x="864523" y="2562167"/>
+                </a:lnTo>
+                <a:lnTo>
+                  <a:pt x="897774" y="2527069"/>
+                </a:lnTo>
+                <a:lnTo>
+                  <a:pt x="931025" y="2491970"/>
+                </a:lnTo>
+                <a:lnTo>
+                  <a:pt x="964276" y="2456872"/>
+                </a:lnTo>
+                <a:lnTo>
+                  <a:pt x="997527" y="2421774"/>
+                </a:lnTo>
+                <a:lnTo>
+                  <a:pt x="1030778" y="2386676"/>
+                </a:lnTo>
+                <a:lnTo>
+                  <a:pt x="1064029" y="2351578"/>
+                </a:lnTo>
+                <a:lnTo>
+                  <a:pt x="1097280" y="2316480"/>
+                </a:lnTo>
+                <a:lnTo>
+                  <a:pt x="1130530" y="2281381"/>
+                </a:lnTo>
+                <a:lnTo>
+                  <a:pt x="1163781" y="2246283"/>
+                </a:lnTo>
+                <a:lnTo>
+                  <a:pt x="1197032" y="2211185"/>
+                </a:lnTo>
+                <a:lnTo>
+                  <a:pt x="1230283" y="2176087"/>
+                </a:lnTo>
+                <a:lnTo>
+                  <a:pt x="1263534" y="2140989"/>
+                </a:lnTo>
+                <a:lnTo>
+                  <a:pt x="1296785" y="2105890"/>
+                </a:lnTo>
+                <a:lnTo>
+                  <a:pt x="1330036" y="2070792"/>
+                </a:lnTo>
+                <a:lnTo>
+                  <a:pt x="1363287" y="2035694"/>
+                </a:lnTo>
+                <a:lnTo>
+                  <a:pt x="1396538" y="2000596"/>
+                </a:lnTo>
+                <a:lnTo>
+                  <a:pt x="1429789" y="1965498"/>
+                </a:lnTo>
+                <a:lnTo>
+                  <a:pt x="1463040" y="1930399"/>
+                </a:lnTo>
+                <a:lnTo>
+                  <a:pt x="1496290" y="1895301"/>
+                </a:lnTo>
+                <a:lnTo>
+                  <a:pt x="1529541" y="1860203"/>
+                </a:lnTo>
+                <a:lnTo>
+                  <a:pt x="1562792" y="1825105"/>
+                </a:lnTo>
+                <a:lnTo>
+                  <a:pt x="1596043" y="1790007"/>
+                </a:lnTo>
+                <a:lnTo>
+                  <a:pt x="1629294" y="1754909"/>
+                </a:lnTo>
+                <a:lnTo>
+                  <a:pt x="1662545" y="1719810"/>
+                </a:lnTo>
+                <a:lnTo>
+                  <a:pt x="1695796" y="1684712"/>
+                </a:lnTo>
+                <a:lnTo>
+                  <a:pt x="1729047" y="1649614"/>
+                </a:lnTo>
+                <a:lnTo>
+                  <a:pt x="1762298" y="1614516"/>
+                </a:lnTo>
+                <a:lnTo>
+                  <a:pt x="1795549" y="1579418"/>
+                </a:lnTo>
+                <a:lnTo>
+                  <a:pt x="1828800" y="1544320"/>
+                </a:lnTo>
+                <a:lnTo>
+                  <a:pt x="1862050" y="1509221"/>
+                </a:lnTo>
+                <a:lnTo>
+                  <a:pt x="1895301" y="1474123"/>
+                </a:lnTo>
+                <a:lnTo>
+                  <a:pt x="1928552" y="1439025"/>
+                </a:lnTo>
+                <a:lnTo>
+                  <a:pt x="1961803" y="1403927"/>
+                </a:lnTo>
+                <a:lnTo>
+                  <a:pt x="1995054" y="1368829"/>
+                </a:lnTo>
+                <a:lnTo>
+                  <a:pt x="2028305" y="1333730"/>
+                </a:lnTo>
+                <a:lnTo>
+                  <a:pt x="2061556" y="1298632"/>
+                </a:lnTo>
+                <a:lnTo>
+                  <a:pt x="2094807" y="1263534"/>
+                </a:lnTo>
+                <a:lnTo>
+                  <a:pt x="2128058" y="1228436"/>
+                </a:lnTo>
+                <a:lnTo>
+                  <a:pt x="2161309" y="1193338"/>
+                </a:lnTo>
+                <a:lnTo>
+                  <a:pt x="2194560" y="1158239"/>
+                </a:lnTo>
+                <a:lnTo>
+                  <a:pt x="2227810" y="1123141"/>
+                </a:lnTo>
+                <a:lnTo>
+                  <a:pt x="2261061" y="1088043"/>
+                </a:lnTo>
+                <a:lnTo>
+                  <a:pt x="2294312" y="1052945"/>
+                </a:lnTo>
+                <a:lnTo>
+                  <a:pt x="2327563" y="1017847"/>
+                </a:lnTo>
+                <a:lnTo>
+                  <a:pt x="2360814" y="982749"/>
+                </a:lnTo>
+                <a:lnTo>
+                  <a:pt x="2394065" y="947650"/>
+                </a:lnTo>
+                <a:lnTo>
+                  <a:pt x="2427316" y="912552"/>
+                </a:lnTo>
+                <a:lnTo>
+                  <a:pt x="2460567" y="877454"/>
+                </a:lnTo>
+                <a:lnTo>
+                  <a:pt x="2493818" y="842356"/>
+                </a:lnTo>
+                <a:lnTo>
+                  <a:pt x="2527069" y="807258"/>
+                </a:lnTo>
+                <a:lnTo>
+                  <a:pt x="2560320" y="772159"/>
+                </a:lnTo>
+                <a:lnTo>
+                  <a:pt x="2593570" y="737061"/>
+                </a:lnTo>
+                <a:lnTo>
+                  <a:pt x="2626821" y="701963"/>
+                </a:lnTo>
+                <a:lnTo>
+                  <a:pt x="2660072" y="666865"/>
+                </a:lnTo>
+                <a:lnTo>
+                  <a:pt x="2693323" y="631767"/>
+                </a:lnTo>
+                <a:lnTo>
+                  <a:pt x="2726574" y="596669"/>
+                </a:lnTo>
+                <a:lnTo>
+                  <a:pt x="2759825" y="561570"/>
+                </a:lnTo>
+                <a:lnTo>
+                  <a:pt x="2793076" y="526472"/>
+                </a:lnTo>
+                <a:lnTo>
+                  <a:pt x="2826327" y="491374"/>
+                </a:lnTo>
+                <a:lnTo>
+                  <a:pt x="2859578" y="456276"/>
+                </a:lnTo>
+                <a:lnTo>
+                  <a:pt x="2892829" y="421178"/>
+                </a:lnTo>
+                <a:lnTo>
+                  <a:pt x="2926080" y="386079"/>
+                </a:lnTo>
+                <a:lnTo>
+                  <a:pt x="2959330" y="350981"/>
+                </a:lnTo>
+                <a:lnTo>
+                  <a:pt x="2992581" y="315883"/>
+                </a:lnTo>
+                <a:lnTo>
+                  <a:pt x="3025832" y="280785"/>
+                </a:lnTo>
+                <a:lnTo>
+                  <a:pt x="3059083" y="245687"/>
+                </a:lnTo>
+                <a:lnTo>
+                  <a:pt x="3092334" y="210589"/>
+                </a:lnTo>
+                <a:lnTo>
+                  <a:pt x="3125585" y="175490"/>
+                </a:lnTo>
+                <a:lnTo>
+                  <a:pt x="3158836" y="140392"/>
+                </a:lnTo>
+                <a:lnTo>
+                  <a:pt x="3192087" y="105294"/>
+                </a:lnTo>
+                <a:lnTo>
+                  <a:pt x="3225338" y="70196"/>
+                </a:lnTo>
+                <a:lnTo>
+                  <a:pt x="3258589" y="35098"/>
+                </a:lnTo>
+                <a:lnTo>
+                  <a:pt x="3291840" y="0"/>
+                </a:lnTo>
+              </a:path>
+            </a:pathLst>
+          </a:custGeom>
+          <a:noFill/>
+          <a:ln w="25400">
+            <a:solidFill>
+              <a:srgbClr val="F2B880"/>
+            </a:solidFill>
+            <a:prstDash val="dash"/>
+          </a:ln>
+          <a:effectLst/>
+        </p:spPr>
+        <p:txBody>
+          <a:bodyPr rtlCol="0" anchor="ctr"/>
+          <a:lstStyle/>
+          <a:p>
+            <a:pPr algn="ctr"/>
+          </a:p>
+        </p:txBody>
+      </p:sp>
+      <p:sp>
+        <p:nvSpPr>
+          <p:cNvPr id="31" name="A-E08 text 29" descr="sci-ppt:o029"/>
           <p:cNvSpPr txBox="1"/>
           <p:nvPr/>
         </p:nvSpPr>
         <p:spPr>
           <a:xfrm>
-            <a:off x="2304288" y="2139696"/>
-            <a:ext cx="822960" cy="310896"/>
+            <a:off x="1119225" y="1627631"/>
+            <a:ext cx="822960" cy="223900"/>
           </a:xfrm>
           <a:prstGeom prst="rect">
             <a:avLst/>
@@ -3304,7 +4565,7 @@
           <a:effectLst/>
         </p:spPr>
         <p:txBody>
-          <a:bodyPr wrap="none" lIns="0" rIns="0" tIns="0" bIns="0" anchor="ctr">
+          <a:bodyPr wrap="none" lIns="18288" rIns="18288" tIns="18288" bIns="18288" anchor="t">
             <a:spAutoFit/>
           </a:bodyPr>
           <a:lstStyle/>
@@ -3315,122 +4576,770 @@
               </a:spcAft>
             </a:pPr>
             <a:r>
-              <a:rPr sz="1296" b="0" i="0">
+              <a:rPr sz="1150" b="0" i="0">
+                <a:solidFill>
+                  <a:srgbClr val="8EDBD4"/>
+                </a:solidFill>
+                <a:latin typeface="Arial"/>
+              </a:rPr>
+              <a:t>exact</a:t>
+            </a:r>
+          </a:p>
+        </p:txBody>
+      </p:sp>
+      <p:sp>
+        <p:nvSpPr>
+          <p:cNvPr id="32" name="A-E08 text 30" descr="sci-ppt:o030"/>
+          <p:cNvSpPr txBox="1"/>
+          <p:nvPr/>
+        </p:nvSpPr>
+        <p:spPr>
+          <a:xfrm>
+            <a:off x="1119225" y="2061972"/>
+            <a:ext cx="2011680" cy="223900"/>
+          </a:xfrm>
+          <a:prstGeom prst="rect">
+            <a:avLst/>
+          </a:prstGeom>
+          <a:noFill/>
+          <a:effectLst/>
+        </p:spPr>
+        <p:txBody>
+          <a:bodyPr wrap="none" lIns="18288" rIns="18288" tIns="18288" bIns="18288" anchor="t">
+            <a:spAutoFit/>
+          </a:bodyPr>
+          <a:lstStyle/>
+          <a:p>
+            <a:pPr algn="l">
+              <a:spcAft>
+                <a:spcPts val="0"/>
+              </a:spcAft>
+            </a:pPr>
+            <a:r>
+              <a:rPr sz="1150" b="0" i="0">
+                <a:solidFill>
+                  <a:srgbClr val="F2B880"/>
+                </a:solidFill>
+                <a:latin typeface="Arial"/>
+              </a:rPr>
+              <a:t>linear 4G_g δR/R_ref</a:t>
+            </a:r>
+          </a:p>
+        </p:txBody>
+      </p:sp>
+      <p:cxnSp>
+        <p:nvCxnSpPr>
+          <p:cNvPr id="33" name="A-E08 line 31" descr="sci-ppt:o031"/>
+          <p:cNvCxnSpPr/>
+          <p:nvPr/>
+        </p:nvCxnSpPr>
+        <p:spPr>
+          <a:xfrm>
+            <a:off x="5212080" y="4846320"/>
+            <a:ext cx="3291840" cy="0"/>
+          </a:xfrm>
+          <a:prstGeom prst="line">
+            <a:avLst/>
+          </a:prstGeom>
+          <a:ln w="19050">
+            <a:solidFill>
+              <a:srgbClr val="B4C7D2"/>
+            </a:solidFill>
+          </a:ln>
+          <a:effectLst/>
+        </p:spPr>
+      </p:cxnSp>
+      <p:cxnSp>
+        <p:nvCxnSpPr>
+          <p:cNvPr id="34" name="A-E08 line 32" descr="sci-ppt:o032"/>
+          <p:cNvCxnSpPr/>
+          <p:nvPr/>
+        </p:nvCxnSpPr>
+        <p:spPr>
+          <a:xfrm>
+            <a:off x="5212080" y="1371600"/>
+            <a:ext cx="0" cy="3474720"/>
+          </a:xfrm>
+          <a:prstGeom prst="line">
+            <a:avLst/>
+          </a:prstGeom>
+          <a:ln w="19050">
+            <a:solidFill>
+              <a:srgbClr val="B4C7D2"/>
+            </a:solidFill>
+          </a:ln>
+          <a:effectLst/>
+        </p:spPr>
+      </p:cxnSp>
+      <p:cxnSp>
+        <p:nvCxnSpPr>
+          <p:cNvPr id="35" name="A-E08 line 33" descr="sci-ppt:o033"/>
+          <p:cNvCxnSpPr/>
+          <p:nvPr/>
+        </p:nvCxnSpPr>
+        <p:spPr>
+          <a:xfrm>
+            <a:off x="5212080" y="4846320"/>
+            <a:ext cx="0" cy="64008"/>
+          </a:xfrm>
+          <a:prstGeom prst="line">
+            <a:avLst/>
+          </a:prstGeom>
+          <a:ln w="12700">
+            <a:solidFill>
+              <a:srgbClr val="B4C7D2"/>
+            </a:solidFill>
+          </a:ln>
+          <a:effectLst/>
+        </p:spPr>
+      </p:cxnSp>
+      <p:cxnSp>
+        <p:nvCxnSpPr>
+          <p:cNvPr id="36" name="A-E08 line 34" descr="sci-ppt:o034"/>
+          <p:cNvCxnSpPr/>
+          <p:nvPr/>
+        </p:nvCxnSpPr>
+        <p:spPr>
+          <a:xfrm>
+            <a:off x="5212080" y="1371600"/>
+            <a:ext cx="0" cy="3474720"/>
+          </a:xfrm>
+          <a:prstGeom prst="line">
+            <a:avLst/>
+          </a:prstGeom>
+          <a:ln w="7620">
+            <a:solidFill>
+              <a:srgbClr val="2E4756"/>
+            </a:solidFill>
+          </a:ln>
+          <a:effectLst/>
+        </p:spPr>
+      </p:cxnSp>
+      <p:sp>
+        <p:nvSpPr>
+          <p:cNvPr id="37" name="A-E08 text 35" descr="sci-ppt:o035"/>
+          <p:cNvSpPr txBox="1"/>
+          <p:nvPr/>
+        </p:nvSpPr>
+        <p:spPr>
+          <a:xfrm>
+            <a:off x="4754880" y="4928616"/>
+            <a:ext cx="914400" cy="208407"/>
+          </a:xfrm>
+          <a:prstGeom prst="rect">
+            <a:avLst/>
+          </a:prstGeom>
+          <a:noFill/>
+          <a:effectLst/>
+        </p:spPr>
+        <p:txBody>
+          <a:bodyPr wrap="none" lIns="18288" rIns="18288" tIns="18288" bIns="18288" anchor="t">
+            <a:spAutoFit/>
+          </a:bodyPr>
+          <a:lstStyle/>
+          <a:p>
+            <a:pPr algn="ctr">
+              <a:spcAft>
+                <a:spcPts val="0"/>
+              </a:spcAft>
+            </a:pPr>
+            <a:r>
+              <a:rPr sz="1050" b="0" i="0">
+                <a:solidFill>
+                  <a:srgbClr val="B4C7D2"/>
+                </a:solidFill>
+                <a:latin typeface="Arial"/>
+              </a:rPr>
+              <a:t>0</a:t>
+            </a:r>
+          </a:p>
+        </p:txBody>
+      </p:sp>
+      <p:cxnSp>
+        <p:nvCxnSpPr>
+          <p:cNvPr id="38" name="A-E08 line 36" descr="sci-ppt:o036"/>
+          <p:cNvCxnSpPr/>
+          <p:nvPr/>
+        </p:nvCxnSpPr>
+        <p:spPr>
+          <a:xfrm>
+            <a:off x="6858000" y="4846320"/>
+            <a:ext cx="0" cy="64008"/>
+          </a:xfrm>
+          <a:prstGeom prst="line">
+            <a:avLst/>
+          </a:prstGeom>
+          <a:ln w="12700">
+            <a:solidFill>
+              <a:srgbClr val="B4C7D2"/>
+            </a:solidFill>
+          </a:ln>
+          <a:effectLst/>
+        </p:spPr>
+      </p:cxnSp>
+      <p:cxnSp>
+        <p:nvCxnSpPr>
+          <p:cNvPr id="39" name="A-E08 line 37" descr="sci-ppt:o037"/>
+          <p:cNvCxnSpPr/>
+          <p:nvPr/>
+        </p:nvCxnSpPr>
+        <p:spPr>
+          <a:xfrm>
+            <a:off x="6858000" y="1371600"/>
+            <a:ext cx="0" cy="3474720"/>
+          </a:xfrm>
+          <a:prstGeom prst="line">
+            <a:avLst/>
+          </a:prstGeom>
+          <a:ln w="7620">
+            <a:solidFill>
+              <a:srgbClr val="2E4756"/>
+            </a:solidFill>
+          </a:ln>
+          <a:effectLst/>
+        </p:spPr>
+      </p:cxnSp>
+      <p:sp>
+        <p:nvSpPr>
+          <p:cNvPr id="40" name="A-E08 text 38" descr="sci-ppt:o038"/>
+          <p:cNvSpPr txBox="1"/>
+          <p:nvPr/>
+        </p:nvSpPr>
+        <p:spPr>
+          <a:xfrm>
+            <a:off x="6400800" y="4928616"/>
+            <a:ext cx="914400" cy="208407"/>
+          </a:xfrm>
+          <a:prstGeom prst="rect">
+            <a:avLst/>
+          </a:prstGeom>
+          <a:noFill/>
+          <a:effectLst/>
+        </p:spPr>
+        <p:txBody>
+          <a:bodyPr wrap="none" lIns="18288" rIns="18288" tIns="18288" bIns="18288" anchor="t">
+            <a:spAutoFit/>
+          </a:bodyPr>
+          <a:lstStyle/>
+          <a:p>
+            <a:pPr algn="ctr">
+              <a:spcAft>
+                <a:spcPts val="0"/>
+              </a:spcAft>
+            </a:pPr>
+            <a:r>
+              <a:rPr sz="1050" b="0" i="0">
+                <a:solidFill>
+                  <a:srgbClr val="B4C7D2"/>
+                </a:solidFill>
+                <a:latin typeface="Arial"/>
+              </a:rPr>
+              <a:t>0.25</a:t>
+            </a:r>
+          </a:p>
+        </p:txBody>
+      </p:sp>
+      <p:cxnSp>
+        <p:nvCxnSpPr>
+          <p:cNvPr id="41" name="A-E08 line 39" descr="sci-ppt:o039"/>
+          <p:cNvCxnSpPr/>
+          <p:nvPr/>
+        </p:nvCxnSpPr>
+        <p:spPr>
+          <a:xfrm>
+            <a:off x="8503920" y="4846320"/>
+            <a:ext cx="0" cy="64008"/>
+          </a:xfrm>
+          <a:prstGeom prst="line">
+            <a:avLst/>
+          </a:prstGeom>
+          <a:ln w="12700">
+            <a:solidFill>
+              <a:srgbClr val="B4C7D2"/>
+            </a:solidFill>
+          </a:ln>
+          <a:effectLst/>
+        </p:spPr>
+      </p:cxnSp>
+      <p:cxnSp>
+        <p:nvCxnSpPr>
+          <p:cNvPr id="42" name="A-E08 line 40" descr="sci-ppt:o040"/>
+          <p:cNvCxnSpPr/>
+          <p:nvPr/>
+        </p:nvCxnSpPr>
+        <p:spPr>
+          <a:xfrm>
+            <a:off x="8503920" y="1371600"/>
+            <a:ext cx="0" cy="3474720"/>
+          </a:xfrm>
+          <a:prstGeom prst="line">
+            <a:avLst/>
+          </a:prstGeom>
+          <a:ln w="7620">
+            <a:solidFill>
+              <a:srgbClr val="2E4756"/>
+            </a:solidFill>
+          </a:ln>
+          <a:effectLst/>
+        </p:spPr>
+      </p:cxnSp>
+      <p:sp>
+        <p:nvSpPr>
+          <p:cNvPr id="43" name="A-E08 text 41" descr="sci-ppt:o041"/>
+          <p:cNvSpPr txBox="1"/>
+          <p:nvPr/>
+        </p:nvSpPr>
+        <p:spPr>
+          <a:xfrm>
+            <a:off x="8046720" y="4928616"/>
+            <a:ext cx="914400" cy="208407"/>
+          </a:xfrm>
+          <a:prstGeom prst="rect">
+            <a:avLst/>
+          </a:prstGeom>
+          <a:noFill/>
+          <a:effectLst/>
+        </p:spPr>
+        <p:txBody>
+          <a:bodyPr wrap="none" lIns="18288" rIns="18288" tIns="18288" bIns="18288" anchor="t">
+            <a:spAutoFit/>
+          </a:bodyPr>
+          <a:lstStyle/>
+          <a:p>
+            <a:pPr algn="ctr">
+              <a:spcAft>
+                <a:spcPts val="0"/>
+              </a:spcAft>
+            </a:pPr>
+            <a:r>
+              <a:rPr sz="1050" b="0" i="0">
+                <a:solidFill>
+                  <a:srgbClr val="B4C7D2"/>
+                </a:solidFill>
+                <a:latin typeface="Arial"/>
+              </a:rPr>
+              <a:t>0.5</a:t>
+            </a:r>
+          </a:p>
+        </p:txBody>
+      </p:sp>
+      <p:cxnSp>
+        <p:nvCxnSpPr>
+          <p:cNvPr id="44" name="A-E08 line 42" descr="sci-ppt:o042"/>
+          <p:cNvCxnSpPr/>
+          <p:nvPr/>
+        </p:nvCxnSpPr>
+        <p:spPr>
+          <a:xfrm>
+            <a:off x="5148072" y="4846320"/>
+            <a:ext cx="64008" cy="0"/>
+          </a:xfrm>
+          <a:prstGeom prst="line">
+            <a:avLst/>
+          </a:prstGeom>
+          <a:ln w="12700">
+            <a:solidFill>
+              <a:srgbClr val="B4C7D2"/>
+            </a:solidFill>
+          </a:ln>
+          <a:effectLst/>
+        </p:spPr>
+      </p:cxnSp>
+      <p:cxnSp>
+        <p:nvCxnSpPr>
+          <p:cNvPr id="45" name="A-E08 line 43" descr="sci-ppt:o043"/>
+          <p:cNvCxnSpPr/>
+          <p:nvPr/>
+        </p:nvCxnSpPr>
+        <p:spPr>
+          <a:xfrm>
+            <a:off x="5148072" y="3977639"/>
+            <a:ext cx="64008" cy="0"/>
+          </a:xfrm>
+          <a:prstGeom prst="line">
+            <a:avLst/>
+          </a:prstGeom>
+          <a:ln w="12700">
+            <a:solidFill>
+              <a:srgbClr val="B4C7D2"/>
+            </a:solidFill>
+          </a:ln>
+          <a:effectLst/>
+        </p:spPr>
+      </p:cxnSp>
+      <p:cxnSp>
+        <p:nvCxnSpPr>
+          <p:cNvPr id="46" name="A-E08 line 44" descr="sci-ppt:o044"/>
+          <p:cNvCxnSpPr/>
+          <p:nvPr/>
+        </p:nvCxnSpPr>
+        <p:spPr>
+          <a:xfrm>
+            <a:off x="5212080" y="3977639"/>
+            <a:ext cx="3291840" cy="0"/>
+          </a:xfrm>
+          <a:prstGeom prst="line">
+            <a:avLst/>
+          </a:prstGeom>
+          <a:ln w="7620">
+            <a:solidFill>
+              <a:srgbClr val="2E4756"/>
+            </a:solidFill>
+          </a:ln>
+          <a:effectLst/>
+        </p:spPr>
+      </p:cxnSp>
+      <p:sp>
+        <p:nvSpPr>
+          <p:cNvPr id="47" name="A-E08 text 45" descr="sci-ppt:o045"/>
+          <p:cNvSpPr txBox="1"/>
+          <p:nvPr/>
+        </p:nvSpPr>
+        <p:spPr>
+          <a:xfrm>
+            <a:off x="4343400" y="3895344"/>
+            <a:ext cx="777240" cy="208407"/>
+          </a:xfrm>
+          <a:prstGeom prst="rect">
+            <a:avLst/>
+          </a:prstGeom>
+          <a:noFill/>
+          <a:effectLst/>
+        </p:spPr>
+        <p:txBody>
+          <a:bodyPr wrap="none" lIns="18288" rIns="18288" tIns="18288" bIns="18288" anchor="t">
+            <a:spAutoFit/>
+          </a:bodyPr>
+          <a:lstStyle/>
+          <a:p>
+            <a:pPr algn="r">
+              <a:spcAft>
+                <a:spcPts val="0"/>
+              </a:spcAft>
+            </a:pPr>
+            <a:r>
+              <a:rPr sz="1050" b="0" i="0">
+                <a:solidFill>
+                  <a:srgbClr val="B4C7D2"/>
+                </a:solidFill>
+                <a:latin typeface="Arial"/>
+              </a:rPr>
+              <a:t>0.005</a:t>
+            </a:r>
+          </a:p>
+        </p:txBody>
+      </p:sp>
+      <p:cxnSp>
+        <p:nvCxnSpPr>
+          <p:cNvPr id="48" name="A-E08 line 46" descr="sci-ppt:o046"/>
+          <p:cNvCxnSpPr/>
+          <p:nvPr/>
+        </p:nvCxnSpPr>
+        <p:spPr>
+          <a:xfrm>
+            <a:off x="5148072" y="3108960"/>
+            <a:ext cx="64008" cy="0"/>
+          </a:xfrm>
+          <a:prstGeom prst="line">
+            <a:avLst/>
+          </a:prstGeom>
+          <a:ln w="12700">
+            <a:solidFill>
+              <a:srgbClr val="B4C7D2"/>
+            </a:solidFill>
+          </a:ln>
+          <a:effectLst/>
+        </p:spPr>
+      </p:cxnSp>
+      <p:cxnSp>
+        <p:nvCxnSpPr>
+          <p:cNvPr id="49" name="A-E08 line 47" descr="sci-ppt:o047"/>
+          <p:cNvCxnSpPr/>
+          <p:nvPr/>
+        </p:nvCxnSpPr>
+        <p:spPr>
+          <a:xfrm>
+            <a:off x="5212080" y="3108960"/>
+            <a:ext cx="3291840" cy="0"/>
+          </a:xfrm>
+          <a:prstGeom prst="line">
+            <a:avLst/>
+          </a:prstGeom>
+          <a:ln w="7620">
+            <a:solidFill>
+              <a:srgbClr val="2E4756"/>
+            </a:solidFill>
+          </a:ln>
+          <a:effectLst/>
+        </p:spPr>
+      </p:cxnSp>
+      <p:sp>
+        <p:nvSpPr>
+          <p:cNvPr id="50" name="A-E08 text 48" descr="sci-ppt:o048"/>
+          <p:cNvSpPr txBox="1"/>
+          <p:nvPr/>
+        </p:nvSpPr>
+        <p:spPr>
+          <a:xfrm>
+            <a:off x="4343400" y="3026664"/>
+            <a:ext cx="777240" cy="208407"/>
+          </a:xfrm>
+          <a:prstGeom prst="rect">
+            <a:avLst/>
+          </a:prstGeom>
+          <a:noFill/>
+          <a:effectLst/>
+        </p:spPr>
+        <p:txBody>
+          <a:bodyPr wrap="none" lIns="18288" rIns="18288" tIns="18288" bIns="18288" anchor="t">
+            <a:spAutoFit/>
+          </a:bodyPr>
+          <a:lstStyle/>
+          <a:p>
+            <a:pPr algn="r">
+              <a:spcAft>
+                <a:spcPts val="0"/>
+              </a:spcAft>
+            </a:pPr>
+            <a:r>
+              <a:rPr sz="1050" b="0" i="0">
+                <a:solidFill>
+                  <a:srgbClr val="B4C7D2"/>
+                </a:solidFill>
+                <a:latin typeface="Arial"/>
+              </a:rPr>
+              <a:t>0.010</a:t>
+            </a:r>
+          </a:p>
+        </p:txBody>
+      </p:sp>
+      <p:cxnSp>
+        <p:nvCxnSpPr>
+          <p:cNvPr id="51" name="A-E08 line 49" descr="sci-ppt:o049"/>
+          <p:cNvCxnSpPr/>
+          <p:nvPr/>
+        </p:nvCxnSpPr>
+        <p:spPr>
+          <a:xfrm>
+            <a:off x="5148072" y="2240280"/>
+            <a:ext cx="64008" cy="0"/>
+          </a:xfrm>
+          <a:prstGeom prst="line">
+            <a:avLst/>
+          </a:prstGeom>
+          <a:ln w="12700">
+            <a:solidFill>
+              <a:srgbClr val="B4C7D2"/>
+            </a:solidFill>
+          </a:ln>
+          <a:effectLst/>
+        </p:spPr>
+      </p:cxnSp>
+      <p:cxnSp>
+        <p:nvCxnSpPr>
+          <p:cNvPr id="52" name="A-E08 line 50" descr="sci-ppt:o050"/>
+          <p:cNvCxnSpPr/>
+          <p:nvPr/>
+        </p:nvCxnSpPr>
+        <p:spPr>
+          <a:xfrm>
+            <a:off x="5212080" y="2240280"/>
+            <a:ext cx="3291840" cy="0"/>
+          </a:xfrm>
+          <a:prstGeom prst="line">
+            <a:avLst/>
+          </a:prstGeom>
+          <a:ln w="7620">
+            <a:solidFill>
+              <a:srgbClr val="2E4756"/>
+            </a:solidFill>
+          </a:ln>
+          <a:effectLst/>
+        </p:spPr>
+      </p:cxnSp>
+      <p:sp>
+        <p:nvSpPr>
+          <p:cNvPr id="53" name="A-E08 text 51" descr="sci-ppt:o051"/>
+          <p:cNvSpPr txBox="1"/>
+          <p:nvPr/>
+        </p:nvSpPr>
+        <p:spPr>
+          <a:xfrm>
+            <a:off x="4343400" y="2157984"/>
+            <a:ext cx="777240" cy="208407"/>
+          </a:xfrm>
+          <a:prstGeom prst="rect">
+            <a:avLst/>
+          </a:prstGeom>
+          <a:noFill/>
+          <a:effectLst/>
+        </p:spPr>
+        <p:txBody>
+          <a:bodyPr wrap="none" lIns="18288" rIns="18288" tIns="18288" bIns="18288" anchor="t">
+            <a:spAutoFit/>
+          </a:bodyPr>
+          <a:lstStyle/>
+          <a:p>
+            <a:pPr algn="r">
+              <a:spcAft>
+                <a:spcPts val="0"/>
+              </a:spcAft>
+            </a:pPr>
+            <a:r>
+              <a:rPr sz="1050" b="0" i="0">
+                <a:solidFill>
+                  <a:srgbClr val="B4C7D2"/>
+                </a:solidFill>
+                <a:latin typeface="Arial"/>
+              </a:rPr>
+              <a:t>0.015</a:t>
+            </a:r>
+          </a:p>
+        </p:txBody>
+      </p:sp>
+      <p:cxnSp>
+        <p:nvCxnSpPr>
+          <p:cNvPr id="54" name="A-E08 line 52" descr="sci-ppt:o052"/>
+          <p:cNvCxnSpPr/>
+          <p:nvPr/>
+        </p:nvCxnSpPr>
+        <p:spPr>
+          <a:xfrm>
+            <a:off x="5148072" y="1371600"/>
+            <a:ext cx="64008" cy="0"/>
+          </a:xfrm>
+          <a:prstGeom prst="line">
+            <a:avLst/>
+          </a:prstGeom>
+          <a:ln w="12700">
+            <a:solidFill>
+              <a:srgbClr val="B4C7D2"/>
+            </a:solidFill>
+          </a:ln>
+          <a:effectLst/>
+        </p:spPr>
+      </p:cxnSp>
+      <p:cxnSp>
+        <p:nvCxnSpPr>
+          <p:cNvPr id="55" name="A-E08 line 53" descr="sci-ppt:o053"/>
+          <p:cNvCxnSpPr/>
+          <p:nvPr/>
+        </p:nvCxnSpPr>
+        <p:spPr>
+          <a:xfrm>
+            <a:off x="5212080" y="1371600"/>
+            <a:ext cx="3291840" cy="0"/>
+          </a:xfrm>
+          <a:prstGeom prst="line">
+            <a:avLst/>
+          </a:prstGeom>
+          <a:ln w="7620">
+            <a:solidFill>
+              <a:srgbClr val="2E4756"/>
+            </a:solidFill>
+          </a:ln>
+          <a:effectLst/>
+        </p:spPr>
+      </p:cxnSp>
+      <p:sp>
+        <p:nvSpPr>
+          <p:cNvPr id="56" name="A-E08 text 54" descr="sci-ppt:o054"/>
+          <p:cNvSpPr txBox="1"/>
+          <p:nvPr/>
+        </p:nvSpPr>
+        <p:spPr>
+          <a:xfrm>
+            <a:off x="4343400" y="1289304"/>
+            <a:ext cx="777240" cy="208407"/>
+          </a:xfrm>
+          <a:prstGeom prst="rect">
+            <a:avLst/>
+          </a:prstGeom>
+          <a:noFill/>
+          <a:effectLst/>
+        </p:spPr>
+        <p:txBody>
+          <a:bodyPr wrap="none" lIns="18288" rIns="18288" tIns="18288" bIns="18288" anchor="t">
+            <a:spAutoFit/>
+          </a:bodyPr>
+          <a:lstStyle/>
+          <a:p>
+            <a:pPr algn="r">
+              <a:spcAft>
+                <a:spcPts val="0"/>
+              </a:spcAft>
+            </a:pPr>
+            <a:r>
+              <a:rPr sz="1050" b="0" i="0">
+                <a:solidFill>
+                  <a:srgbClr val="B4C7D2"/>
+                </a:solidFill>
+                <a:latin typeface="Arial"/>
+              </a:rPr>
+              <a:t>0.020</a:t>
+            </a:r>
+          </a:p>
+        </p:txBody>
+      </p:sp>
+      <p:sp>
+        <p:nvSpPr>
+          <p:cNvPr id="57" name="A-E08 text 55" descr="sci-ppt:o055"/>
+          <p:cNvSpPr txBox="1"/>
+          <p:nvPr/>
+        </p:nvSpPr>
+        <p:spPr>
+          <a:xfrm>
+            <a:off x="5212080" y="5129783"/>
+            <a:ext cx="3291840" cy="231648"/>
+          </a:xfrm>
+          <a:prstGeom prst="rect">
+            <a:avLst/>
+          </a:prstGeom>
+          <a:noFill/>
+          <a:effectLst/>
+        </p:spPr>
+        <p:txBody>
+          <a:bodyPr wrap="none" lIns="18288" rIns="18288" tIns="18288" bIns="18288" anchor="t">
+            <a:spAutoFit/>
+          </a:bodyPr>
+          <a:lstStyle/>
+          <a:p>
+            <a:pPr algn="ctr">
+              <a:spcAft>
+                <a:spcPts val="0"/>
+              </a:spcAft>
+            </a:pPr>
+            <a:r>
+              <a:rPr sz="1200" b="0" i="0">
                 <a:solidFill>
                   <a:srgbClr val="E7F0F3"/>
                 </a:solidFill>
                 <a:latin typeface="Arial"/>
               </a:rPr>
-              <a:t>r₀</a:t>
-            </a:r>
-          </a:p>
-        </p:txBody>
-      </p:sp>
-      <p:sp>
-        <p:nvSpPr>
-          <p:cNvPr id="9" name="ellipse 7" descr="sci-ppt:obj-007"/>
-          <p:cNvSpPr/>
-          <p:nvPr/>
-        </p:nvSpPr>
-        <p:spPr>
-          <a:xfrm>
-            <a:off x="4682139" y="750219"/>
-            <a:ext cx="1791401" cy="1791401"/>
-          </a:xfrm>
-          <a:prstGeom prst="ellipse">
+              <a:t>δR / R_ref</a:t>
+            </a:r>
+          </a:p>
+        </p:txBody>
+      </p:sp>
+      <p:sp>
+        <p:nvSpPr>
+          <p:cNvPr id="58" name="A-E08 text 56" descr="sci-ppt:o056"/>
+          <p:cNvSpPr txBox="1"/>
+          <p:nvPr/>
+        </p:nvSpPr>
+        <p:spPr>
+          <a:xfrm>
+            <a:off x="4663440" y="1024128"/>
+            <a:ext cx="3291840" cy="231648"/>
+          </a:xfrm>
+          <a:prstGeom prst="rect">
             <a:avLst/>
           </a:prstGeom>
           <a:noFill/>
-          <a:ln w="17780">
-            <a:solidFill>
-              <a:srgbClr val="B4C7D2"/>
-            </a:solidFill>
-          </a:ln>
-          <a:effectLst/>
-        </p:spPr>
-        <p:txBody>
-          <a:bodyPr rtlCol="0" anchor="ctr"/>
-          <a:lstStyle/>
-          <a:p>
-            <a:pPr algn="ctr"/>
-          </a:p>
-        </p:txBody>
-      </p:sp>
-      <p:sp>
-        <p:nvSpPr>
-          <p:cNvPr id="10" name="ellipse 8" descr="sci-ppt:obj-008"/>
-          <p:cNvSpPr/>
-          <p:nvPr/>
-        </p:nvSpPr>
-        <p:spPr>
-          <a:xfrm>
-            <a:off x="4864608" y="932688"/>
-            <a:ext cx="1426464" cy="1426464"/>
-          </a:xfrm>
-          <a:prstGeom prst="ellipse">
-            <a:avLst/>
-          </a:prstGeom>
-          <a:solidFill>
-            <a:srgbClr val="213E4B"/>
-          </a:solidFill>
-          <a:ln w="17780">
-            <a:solidFill>
-              <a:srgbClr val="B4C7D2"/>
-            </a:solidFill>
-          </a:ln>
-          <a:effectLst/>
-        </p:spPr>
-        <p:txBody>
-          <a:bodyPr rtlCol="0" anchor="ctr"/>
-          <a:lstStyle/>
-          <a:p>
-            <a:pPr algn="ctr"/>
-          </a:p>
-        </p:txBody>
-      </p:sp>
-      <p:cxnSp>
-        <p:nvCxnSpPr>
-          <p:cNvPr id="11" name="arrow 9" descr="sci-ppt:obj-009"/>
-          <p:cNvCxnSpPr/>
-          <p:nvPr/>
-        </p:nvCxnSpPr>
-        <p:spPr>
-          <a:xfrm>
-            <a:off x="5577840" y="1645920"/>
-            <a:ext cx="713232" cy="0"/>
-          </a:xfrm>
-          <a:prstGeom prst="line">
-            <a:avLst/>
-          </a:prstGeom>
-          <a:ln w="21590">
-            <a:solidFill>
-              <a:srgbClr val="8EDBD4"/>
-            </a:solidFill>
-            <a:headEnd type="none" w="med" len="med"/>
-            <a:tailEnd type="triangle" w="med" len="med"/>
-          </a:ln>
-          <a:effectLst/>
-        </p:spPr>
-      </p:cxnSp>
-      <p:sp>
-        <p:nvSpPr>
-          <p:cNvPr id="12" name="text 10" descr="sci-ppt:obj-010"/>
-          <p:cNvSpPr txBox="1"/>
-          <p:nvPr/>
-        </p:nvSpPr>
-        <p:spPr>
-          <a:xfrm>
-            <a:off x="5952744" y="1271016"/>
-            <a:ext cx="640080" cy="310896"/>
-          </a:xfrm>
-          <a:prstGeom prst="rect">
-            <a:avLst/>
-          </a:prstGeom>
-          <a:noFill/>
-          <a:effectLst/>
-        </p:spPr>
-        <p:txBody>
-          <a:bodyPr wrap="none" lIns="0" rIns="0" tIns="0" bIns="0" anchor="ctr">
+          <a:effectLst/>
+        </p:spPr>
+        <p:txBody>
+          <a:bodyPr wrap="none" lIns="18288" rIns="18288" tIns="18288" bIns="18288" anchor="t">
             <a:spAutoFit/>
           </a:bodyPr>
           <a:lstStyle/>
@@ -3441,51 +5350,704 @@
               </a:spcAft>
             </a:pPr>
             <a:r>
-              <a:rPr sz="1296" b="0" i="0">
+              <a:rPr sz="1200" b="0" i="0">
                 <a:solidFill>
                   <a:srgbClr val="E7F0F3"/>
                 </a:solidFill>
                 <a:latin typeface="Arial"/>
               </a:rPr>
-              <a:t>R</a:t>
-            </a:r>
-          </a:p>
-        </p:txBody>
-      </p:sp>
-      <p:cxnSp>
-        <p:nvCxnSpPr>
-          <p:cNvPr id="13" name="arrow 11" descr="sci-ppt:obj-011"/>
-          <p:cNvCxnSpPr/>
-          <p:nvPr/>
-        </p:nvCxnSpPr>
-        <p:spPr>
-          <a:xfrm>
-            <a:off x="5577840" y="1645920"/>
-            <a:ext cx="633355" cy="633355"/>
-          </a:xfrm>
-          <a:prstGeom prst="line">
-            <a:avLst/>
-          </a:prstGeom>
-          <a:ln w="21590">
+              <a:t>W_g  (nJ)</a:t>
+            </a:r>
+          </a:p>
+        </p:txBody>
+      </p:sp>
+      <p:sp>
+        <p:nvSpPr>
+          <p:cNvPr id="59" name="A-E08 polygon 57" descr="sci-ppt:o057"/>
+          <p:cNvSpPr/>
+          <p:nvPr/>
+        </p:nvSpPr>
+        <p:spPr>
+          <a:xfrm>
+            <a:off x="5212080" y="1776151"/>
+            <a:ext cx="3291840" cy="3070169"/>
+          </a:xfrm>
+          <a:custGeom>
+            <a:avLst/>
+            <a:gdLst/>
+            <a:ahLst/>
+            <a:cxnLst/>
+            <a:rect l="l" t="t" r="r" b="b"/>
+            <a:pathLst>
+              <a:path w="3291840" h="3070169">
+                <a:moveTo>
+                  <a:pt x="0" y="3070169"/>
+                </a:moveTo>
+                <a:lnTo>
+                  <a:pt x="33250" y="3069890"/>
+                </a:lnTo>
+                <a:lnTo>
+                  <a:pt x="66501" y="3069053"/>
+                </a:lnTo>
+                <a:lnTo>
+                  <a:pt x="99752" y="3067656"/>
+                </a:lnTo>
+                <a:lnTo>
+                  <a:pt x="133003" y="3065698"/>
+                </a:lnTo>
+                <a:lnTo>
+                  <a:pt x="166254" y="3063177"/>
+                </a:lnTo>
+                <a:lnTo>
+                  <a:pt x="199505" y="3060092"/>
+                </a:lnTo>
+                <a:lnTo>
+                  <a:pt x="232756" y="3056440"/>
+                </a:lnTo>
+                <a:lnTo>
+                  <a:pt x="266007" y="3052221"/>
+                </a:lnTo>
+                <a:lnTo>
+                  <a:pt x="299258" y="3047432"/>
+                </a:lnTo>
+                <a:lnTo>
+                  <a:pt x="332509" y="3042073"/>
+                </a:lnTo>
+                <a:lnTo>
+                  <a:pt x="365760" y="3036140"/>
+                </a:lnTo>
+                <a:lnTo>
+                  <a:pt x="399010" y="3029633"/>
+                </a:lnTo>
+                <a:lnTo>
+                  <a:pt x="432261" y="3022549"/>
+                </a:lnTo>
+                <a:lnTo>
+                  <a:pt x="465512" y="3014886"/>
+                </a:lnTo>
+                <a:lnTo>
+                  <a:pt x="498763" y="3006644"/>
+                </a:lnTo>
+                <a:lnTo>
+                  <a:pt x="532014" y="2997819"/>
+                </a:lnTo>
+                <a:lnTo>
+                  <a:pt x="565265" y="2988410"/>
+                </a:lnTo>
+                <a:lnTo>
+                  <a:pt x="598516" y="2978415"/>
+                </a:lnTo>
+                <a:lnTo>
+                  <a:pt x="631767" y="2967831"/>
+                </a:lnTo>
+                <a:lnTo>
+                  <a:pt x="665018" y="2956657"/>
+                </a:lnTo>
+                <a:lnTo>
+                  <a:pt x="698269" y="2944891"/>
+                </a:lnTo>
+                <a:lnTo>
+                  <a:pt x="731520" y="2932531"/>
+                </a:lnTo>
+                <a:lnTo>
+                  <a:pt x="764770" y="2919574"/>
+                </a:lnTo>
+                <a:lnTo>
+                  <a:pt x="798021" y="2906019"/>
+                </a:lnTo>
+                <a:lnTo>
+                  <a:pt x="831272" y="2891862"/>
+                </a:lnTo>
+                <a:lnTo>
+                  <a:pt x="864523" y="2877103"/>
+                </a:lnTo>
+                <a:lnTo>
+                  <a:pt x="897774" y="2861738"/>
+                </a:lnTo>
+                <a:lnTo>
+                  <a:pt x="931025" y="2845766"/>
+                </a:lnTo>
+                <a:lnTo>
+                  <a:pt x="964276" y="2829185"/>
+                </a:lnTo>
+                <a:lnTo>
+                  <a:pt x="997527" y="2811991"/>
+                </a:lnTo>
+                <a:lnTo>
+                  <a:pt x="1030778" y="2794183"/>
+                </a:lnTo>
+                <a:lnTo>
+                  <a:pt x="1064029" y="2775758"/>
+                </a:lnTo>
+                <a:lnTo>
+                  <a:pt x="1097280" y="2756714"/>
+                </a:lnTo>
+                <a:lnTo>
+                  <a:pt x="1130530" y="2737049"/>
+                </a:lnTo>
+                <a:lnTo>
+                  <a:pt x="1163781" y="2716760"/>
+                </a:lnTo>
+                <a:lnTo>
+                  <a:pt x="1197032" y="2695845"/>
+                </a:lnTo>
+                <a:lnTo>
+                  <a:pt x="1230283" y="2674301"/>
+                </a:lnTo>
+                <a:lnTo>
+                  <a:pt x="1263534" y="2652127"/>
+                </a:lnTo>
+                <a:lnTo>
+                  <a:pt x="1296785" y="2629319"/>
+                </a:lnTo>
+                <a:lnTo>
+                  <a:pt x="1330036" y="2605875"/>
+                </a:lnTo>
+                <a:lnTo>
+                  <a:pt x="1363287" y="2581792"/>
+                </a:lnTo>
+                <a:lnTo>
+                  <a:pt x="1396538" y="2557069"/>
+                </a:lnTo>
+                <a:lnTo>
+                  <a:pt x="1429789" y="2531702"/>
+                </a:lnTo>
+                <a:lnTo>
+                  <a:pt x="1463040" y="2505688"/>
+                </a:lnTo>
+                <a:lnTo>
+                  <a:pt x="1496290" y="2479027"/>
+                </a:lnTo>
+                <a:lnTo>
+                  <a:pt x="1529541" y="2451714"/>
+                </a:lnTo>
+                <a:lnTo>
+                  <a:pt x="1562792" y="2423747"/>
+                </a:lnTo>
+                <a:lnTo>
+                  <a:pt x="1596043" y="2395124"/>
+                </a:lnTo>
+                <a:lnTo>
+                  <a:pt x="1629294" y="2365842"/>
+                </a:lnTo>
+                <a:lnTo>
+                  <a:pt x="1662545" y="2335898"/>
+                </a:lnTo>
+                <a:lnTo>
+                  <a:pt x="1695796" y="2305290"/>
+                </a:lnTo>
+                <a:lnTo>
+                  <a:pt x="1729047" y="2274015"/>
+                </a:lnTo>
+                <a:lnTo>
+                  <a:pt x="1762298" y="2242071"/>
+                </a:lnTo>
+                <a:lnTo>
+                  <a:pt x="1795549" y="2209454"/>
+                </a:lnTo>
+                <a:lnTo>
+                  <a:pt x="1828800" y="2176162"/>
+                </a:lnTo>
+                <a:lnTo>
+                  <a:pt x="1862050" y="2142192"/>
+                </a:lnTo>
+                <a:lnTo>
+                  <a:pt x="1895301" y="2107541"/>
+                </a:lnTo>
+                <a:lnTo>
+                  <a:pt x="1928552" y="2072208"/>
+                </a:lnTo>
+                <a:lnTo>
+                  <a:pt x="1961803" y="2036188"/>
+                </a:lnTo>
+                <a:lnTo>
+                  <a:pt x="1995054" y="1999480"/>
+                </a:lnTo>
+                <a:lnTo>
+                  <a:pt x="2028305" y="1962080"/>
+                </a:lnTo>
+                <a:lnTo>
+                  <a:pt x="2061556" y="1923986"/>
+                </a:lnTo>
+                <a:lnTo>
+                  <a:pt x="2094807" y="1885195"/>
+                </a:lnTo>
+                <a:lnTo>
+                  <a:pt x="2128058" y="1845703"/>
+                </a:lnTo>
+                <a:lnTo>
+                  <a:pt x="2161309" y="1805509"/>
+                </a:lnTo>
+                <a:lnTo>
+                  <a:pt x="2194560" y="1764610"/>
+                </a:lnTo>
+                <a:lnTo>
+                  <a:pt x="2227810" y="1723002"/>
+                </a:lnTo>
+                <a:lnTo>
+                  <a:pt x="2261061" y="1680682"/>
+                </a:lnTo>
+                <a:lnTo>
+                  <a:pt x="2294312" y="1637649"/>
+                </a:lnTo>
+                <a:lnTo>
+                  <a:pt x="2327563" y="1593898"/>
+                </a:lnTo>
+                <a:lnTo>
+                  <a:pt x="2360814" y="1549428"/>
+                </a:lnTo>
+                <a:lnTo>
+                  <a:pt x="2394065" y="1504235"/>
+                </a:lnTo>
+                <a:lnTo>
+                  <a:pt x="2427316" y="1458316"/>
+                </a:lnTo>
+                <a:lnTo>
+                  <a:pt x="2460567" y="1411668"/>
+                </a:lnTo>
+                <a:lnTo>
+                  <a:pt x="2493818" y="1364289"/>
+                </a:lnTo>
+                <a:lnTo>
+                  <a:pt x="2527069" y="1316176"/>
+                </a:lnTo>
+                <a:lnTo>
+                  <a:pt x="2560320" y="1267325"/>
+                </a:lnTo>
+                <a:lnTo>
+                  <a:pt x="2593570" y="1217733"/>
+                </a:lnTo>
+                <a:lnTo>
+                  <a:pt x="2626821" y="1167399"/>
+                </a:lnTo>
+                <a:lnTo>
+                  <a:pt x="2660072" y="1116318"/>
+                </a:lnTo>
+                <a:lnTo>
+                  <a:pt x="2693323" y="1064488"/>
+                </a:lnTo>
+                <a:lnTo>
+                  <a:pt x="2726574" y="1011905"/>
+                </a:lnTo>
+                <a:lnTo>
+                  <a:pt x="2759825" y="958568"/>
+                </a:lnTo>
+                <a:lnTo>
+                  <a:pt x="2793076" y="904472"/>
+                </a:lnTo>
+                <a:lnTo>
+                  <a:pt x="2826327" y="849616"/>
+                </a:lnTo>
+                <a:lnTo>
+                  <a:pt x="2859578" y="793995"/>
+                </a:lnTo>
+                <a:lnTo>
+                  <a:pt x="2892829" y="737606"/>
+                </a:lnTo>
+                <a:lnTo>
+                  <a:pt x="2926080" y="680448"/>
+                </a:lnTo>
+                <a:lnTo>
+                  <a:pt x="2959330" y="622516"/>
+                </a:lnTo>
+                <a:lnTo>
+                  <a:pt x="2992581" y="563808"/>
+                </a:lnTo>
+                <a:lnTo>
+                  <a:pt x="3025832" y="504321"/>
+                </a:lnTo>
+                <a:lnTo>
+                  <a:pt x="3059083" y="444051"/>
+                </a:lnTo>
+                <a:lnTo>
+                  <a:pt x="3092334" y="382996"/>
+                </a:lnTo>
+                <a:lnTo>
+                  <a:pt x="3125585" y="321153"/>
+                </a:lnTo>
+                <a:lnTo>
+                  <a:pt x="3158836" y="258517"/>
+                </a:lnTo>
+                <a:lnTo>
+                  <a:pt x="3192087" y="195088"/>
+                </a:lnTo>
+                <a:lnTo>
+                  <a:pt x="3225338" y="130860"/>
+                </a:lnTo>
+                <a:lnTo>
+                  <a:pt x="3258589" y="65832"/>
+                </a:lnTo>
+                <a:lnTo>
+                  <a:pt x="3291840" y="0"/>
+                </a:lnTo>
+              </a:path>
+            </a:pathLst>
+          </a:custGeom>
+          <a:noFill/>
+          <a:ln w="38100">
             <a:solidFill>
               <a:srgbClr val="8EDBD4"/>
             </a:solidFill>
-            <a:headEnd type="none" w="med" len="med"/>
-            <a:tailEnd type="triangle" w="med" len="med"/>
           </a:ln>
           <a:effectLst/>
         </p:spPr>
-      </p:cxnSp>
-      <p:sp>
-        <p:nvSpPr>
-          <p:cNvPr id="14" name="text 12" descr="sci-ppt:obj-012"/>
+        <p:txBody>
+          <a:bodyPr rtlCol="0" anchor="ctr"/>
+          <a:lstStyle/>
+          <a:p>
+            <a:pPr algn="ctr"/>
+          </a:p>
+        </p:txBody>
+      </p:sp>
+      <p:sp>
+        <p:nvSpPr>
+          <p:cNvPr id="60" name="A-E08 polygon 58" descr="sci-ppt:o058"/>
+          <p:cNvSpPr/>
+          <p:nvPr/>
+        </p:nvSpPr>
+        <p:spPr>
+          <a:xfrm>
+            <a:off x="5212080" y="2117281"/>
+            <a:ext cx="3291840" cy="2729039"/>
+          </a:xfrm>
+          <a:custGeom>
+            <a:avLst/>
+            <a:gdLst/>
+            <a:ahLst/>
+            <a:cxnLst/>
+            <a:rect l="l" t="t" r="r" b="b"/>
+            <a:pathLst>
+              <a:path w="3291840" h="2729039">
+                <a:moveTo>
+                  <a:pt x="0" y="2729039"/>
+                </a:moveTo>
+                <a:lnTo>
+                  <a:pt x="33250" y="2728760"/>
+                </a:lnTo>
+                <a:lnTo>
+                  <a:pt x="66501" y="2727925"/>
+                </a:lnTo>
+                <a:lnTo>
+                  <a:pt x="99752" y="2726532"/>
+                </a:lnTo>
+                <a:lnTo>
+                  <a:pt x="133003" y="2724583"/>
+                </a:lnTo>
+                <a:lnTo>
+                  <a:pt x="166254" y="2722077"/>
+                </a:lnTo>
+                <a:lnTo>
+                  <a:pt x="199505" y="2719014"/>
+                </a:lnTo>
+                <a:lnTo>
+                  <a:pt x="232756" y="2715395"/>
+                </a:lnTo>
+                <a:lnTo>
+                  <a:pt x="266007" y="2711218"/>
+                </a:lnTo>
+                <a:lnTo>
+                  <a:pt x="299258" y="2706484"/>
+                </a:lnTo>
+                <a:lnTo>
+                  <a:pt x="332509" y="2701194"/>
+                </a:lnTo>
+                <a:lnTo>
+                  <a:pt x="365760" y="2695347"/>
+                </a:lnTo>
+                <a:lnTo>
+                  <a:pt x="399010" y="2688942"/>
+                </a:lnTo>
+                <a:lnTo>
+                  <a:pt x="432261" y="2681981"/>
+                </a:lnTo>
+                <a:lnTo>
+                  <a:pt x="465512" y="2674463"/>
+                </a:lnTo>
+                <a:lnTo>
+                  <a:pt x="498763" y="2666388"/>
+                </a:lnTo>
+                <a:lnTo>
+                  <a:pt x="532014" y="2657757"/>
+                </a:lnTo>
+                <a:lnTo>
+                  <a:pt x="565265" y="2648568"/>
+                </a:lnTo>
+                <a:lnTo>
+                  <a:pt x="598516" y="2638822"/>
+                </a:lnTo>
+                <a:lnTo>
+                  <a:pt x="631767" y="2628520"/>
+                </a:lnTo>
+                <a:lnTo>
+                  <a:pt x="665018" y="2617661"/>
+                </a:lnTo>
+                <a:lnTo>
+                  <a:pt x="698269" y="2606244"/>
+                </a:lnTo>
+                <a:lnTo>
+                  <a:pt x="731520" y="2594271"/>
+                </a:lnTo>
+                <a:lnTo>
+                  <a:pt x="764770" y="2581741"/>
+                </a:lnTo>
+                <a:lnTo>
+                  <a:pt x="798021" y="2568654"/>
+                </a:lnTo>
+                <a:lnTo>
+                  <a:pt x="831272" y="2555010"/>
+                </a:lnTo>
+                <a:lnTo>
+                  <a:pt x="864523" y="2540810"/>
+                </a:lnTo>
+                <a:lnTo>
+                  <a:pt x="897774" y="2526052"/>
+                </a:lnTo>
+                <a:lnTo>
+                  <a:pt x="931025" y="2510738"/>
+                </a:lnTo>
+                <a:lnTo>
+                  <a:pt x="964276" y="2494866"/>
+                </a:lnTo>
+                <a:lnTo>
+                  <a:pt x="997527" y="2478438"/>
+                </a:lnTo>
+                <a:lnTo>
+                  <a:pt x="1030778" y="2461453"/>
+                </a:lnTo>
+                <a:lnTo>
+                  <a:pt x="1064029" y="2443911"/>
+                </a:lnTo>
+                <a:lnTo>
+                  <a:pt x="1097280" y="2425812"/>
+                </a:lnTo>
+                <a:lnTo>
+                  <a:pt x="1130530" y="2407156"/>
+                </a:lnTo>
+                <a:lnTo>
+                  <a:pt x="1163781" y="2387943"/>
+                </a:lnTo>
+                <a:lnTo>
+                  <a:pt x="1197032" y="2368174"/>
+                </a:lnTo>
+                <a:lnTo>
+                  <a:pt x="1230283" y="2347847"/>
+                </a:lnTo>
+                <a:lnTo>
+                  <a:pt x="1263534" y="2326964"/>
+                </a:lnTo>
+                <a:lnTo>
+                  <a:pt x="1296785" y="2305524"/>
+                </a:lnTo>
+                <a:lnTo>
+                  <a:pt x="1330036" y="2283527"/>
+                </a:lnTo>
+                <a:lnTo>
+                  <a:pt x="1363287" y="2260973"/>
+                </a:lnTo>
+                <a:lnTo>
+                  <a:pt x="1396538" y="2237862"/>
+                </a:lnTo>
+                <a:lnTo>
+                  <a:pt x="1429789" y="2214194"/>
+                </a:lnTo>
+                <a:lnTo>
+                  <a:pt x="1463040" y="2189969"/>
+                </a:lnTo>
+                <a:lnTo>
+                  <a:pt x="1496290" y="2165188"/>
+                </a:lnTo>
+                <a:lnTo>
+                  <a:pt x="1529541" y="2139849"/>
+                </a:lnTo>
+                <a:lnTo>
+                  <a:pt x="1562792" y="2113954"/>
+                </a:lnTo>
+                <a:lnTo>
+                  <a:pt x="1596043" y="2087501"/>
+                </a:lnTo>
+                <a:lnTo>
+                  <a:pt x="1629294" y="2060492"/>
+                </a:lnTo>
+                <a:lnTo>
+                  <a:pt x="1662545" y="2032926"/>
+                </a:lnTo>
+                <a:lnTo>
+                  <a:pt x="1695796" y="2004803"/>
+                </a:lnTo>
+                <a:lnTo>
+                  <a:pt x="1729047" y="1976123"/>
+                </a:lnTo>
+                <a:lnTo>
+                  <a:pt x="1762298" y="1946887"/>
+                </a:lnTo>
+                <a:lnTo>
+                  <a:pt x="1795549" y="1917093"/>
+                </a:lnTo>
+                <a:lnTo>
+                  <a:pt x="1828800" y="1886743"/>
+                </a:lnTo>
+                <a:lnTo>
+                  <a:pt x="1862050" y="1855835"/>
+                </a:lnTo>
+                <a:lnTo>
+                  <a:pt x="1895301" y="1824371"/>
+                </a:lnTo>
+                <a:lnTo>
+                  <a:pt x="1928552" y="1792350"/>
+                </a:lnTo>
+                <a:lnTo>
+                  <a:pt x="1961803" y="1759772"/>
+                </a:lnTo>
+                <a:lnTo>
+                  <a:pt x="1995054" y="1726637"/>
+                </a:lnTo>
+                <a:lnTo>
+                  <a:pt x="2028305" y="1692945"/>
+                </a:lnTo>
+                <a:lnTo>
+                  <a:pt x="2061556" y="1658696"/>
+                </a:lnTo>
+                <a:lnTo>
+                  <a:pt x="2094807" y="1623891"/>
+                </a:lnTo>
+                <a:lnTo>
+                  <a:pt x="2128058" y="1588528"/>
+                </a:lnTo>
+                <a:lnTo>
+                  <a:pt x="2161309" y="1552609"/>
+                </a:lnTo>
+                <a:lnTo>
+                  <a:pt x="2194560" y="1516132"/>
+                </a:lnTo>
+                <a:lnTo>
+                  <a:pt x="2227810" y="1479099"/>
+                </a:lnTo>
+                <a:lnTo>
+                  <a:pt x="2261061" y="1441509"/>
+                </a:lnTo>
+                <a:lnTo>
+                  <a:pt x="2294312" y="1403362"/>
+                </a:lnTo>
+                <a:lnTo>
+                  <a:pt x="2327563" y="1364658"/>
+                </a:lnTo>
+                <a:lnTo>
+                  <a:pt x="2360814" y="1325398"/>
+                </a:lnTo>
+                <a:lnTo>
+                  <a:pt x="2394065" y="1285580"/>
+                </a:lnTo>
+                <a:lnTo>
+                  <a:pt x="2427316" y="1245205"/>
+                </a:lnTo>
+                <a:lnTo>
+                  <a:pt x="2460567" y="1204274"/>
+                </a:lnTo>
+                <a:lnTo>
+                  <a:pt x="2493818" y="1162786"/>
+                </a:lnTo>
+                <a:lnTo>
+                  <a:pt x="2527069" y="1120741"/>
+                </a:lnTo>
+                <a:lnTo>
+                  <a:pt x="2560320" y="1078139"/>
+                </a:lnTo>
+                <a:lnTo>
+                  <a:pt x="2593570" y="1034980"/>
+                </a:lnTo>
+                <a:lnTo>
+                  <a:pt x="2626821" y="991264"/>
+                </a:lnTo>
+                <a:lnTo>
+                  <a:pt x="2660072" y="946991"/>
+                </a:lnTo>
+                <a:lnTo>
+                  <a:pt x="2693323" y="902161"/>
+                </a:lnTo>
+                <a:lnTo>
+                  <a:pt x="2726574" y="856775"/>
+                </a:lnTo>
+                <a:lnTo>
+                  <a:pt x="2759825" y="810831"/>
+                </a:lnTo>
+                <a:lnTo>
+                  <a:pt x="2793076" y="764331"/>
+                </a:lnTo>
+                <a:lnTo>
+                  <a:pt x="2826327" y="717274"/>
+                </a:lnTo>
+                <a:lnTo>
+                  <a:pt x="2859578" y="669660"/>
+                </a:lnTo>
+                <a:lnTo>
+                  <a:pt x="2892829" y="621489"/>
+                </a:lnTo>
+                <a:lnTo>
+                  <a:pt x="2926080" y="572761"/>
+                </a:lnTo>
+                <a:lnTo>
+                  <a:pt x="2959330" y="523476"/>
+                </a:lnTo>
+                <a:lnTo>
+                  <a:pt x="2992581" y="473635"/>
+                </a:lnTo>
+                <a:lnTo>
+                  <a:pt x="3025832" y="423236"/>
+                </a:lnTo>
+                <a:lnTo>
+                  <a:pt x="3059083" y="372281"/>
+                </a:lnTo>
+                <a:lnTo>
+                  <a:pt x="3092334" y="320768"/>
+                </a:lnTo>
+                <a:lnTo>
+                  <a:pt x="3125585" y="268699"/>
+                </a:lnTo>
+                <a:lnTo>
+                  <a:pt x="3158836" y="216073"/>
+                </a:lnTo>
+                <a:lnTo>
+                  <a:pt x="3192087" y="162890"/>
+                </a:lnTo>
+                <a:lnTo>
+                  <a:pt x="3225338" y="109150"/>
+                </a:lnTo>
+                <a:lnTo>
+                  <a:pt x="3258589" y="54853"/>
+                </a:lnTo>
+                <a:lnTo>
+                  <a:pt x="3291840" y="0"/>
+                </a:lnTo>
+              </a:path>
+            </a:pathLst>
+          </a:custGeom>
+          <a:noFill/>
+          <a:ln w="25400">
+            <a:solidFill>
+              <a:srgbClr val="F2B880"/>
+            </a:solidFill>
+            <a:prstDash val="dash"/>
+          </a:ln>
+          <a:effectLst/>
+        </p:spPr>
+        <p:txBody>
+          <a:bodyPr rtlCol="0" anchor="ctr"/>
+          <a:lstStyle/>
+          <a:p>
+            <a:pPr algn="ctr"/>
+          </a:p>
+        </p:txBody>
+      </p:sp>
+      <p:sp>
+        <p:nvSpPr>
+          <p:cNvPr id="61" name="A-E08 text 59" descr="sci-ppt:o059"/>
           <p:cNvSpPr txBox="1"/>
           <p:nvPr/>
         </p:nvSpPr>
         <p:spPr>
           <a:xfrm>
-            <a:off x="6373368" y="2231136"/>
-            <a:ext cx="640080" cy="310896"/>
+            <a:off x="5416905" y="1540764"/>
+            <a:ext cx="822960" cy="223900"/>
           </a:xfrm>
           <a:prstGeom prst="rect">
             <a:avLst/>
@@ -3494,7 +6056,7 @@
           <a:effectLst/>
         </p:spPr>
         <p:txBody>
-          <a:bodyPr wrap="none" lIns="0" rIns="0" tIns="0" bIns="0" anchor="ctr">
+          <a:bodyPr wrap="none" lIns="18288" rIns="18288" tIns="18288" bIns="18288" anchor="t">
             <a:spAutoFit/>
           </a:bodyPr>
           <a:lstStyle/>
@@ -3505,51 +6067,179 @@
               </a:spcAft>
             </a:pPr>
             <a:r>
-              <a:rPr sz="1296" b="0" i="0">
+              <a:rPr sz="1150" b="0" i="0">
+                <a:solidFill>
+                  <a:srgbClr val="8EDBD4"/>
+                </a:solidFill>
+                <a:latin typeface="Arial"/>
+              </a:rPr>
+              <a:t>exact</a:t>
+            </a:r>
+          </a:p>
+        </p:txBody>
+      </p:sp>
+      <p:sp>
+        <p:nvSpPr>
+          <p:cNvPr id="62" name="A-E08 text 60" descr="sci-ppt:o060"/>
+          <p:cNvSpPr txBox="1"/>
+          <p:nvPr/>
+        </p:nvSpPr>
+        <p:spPr>
+          <a:xfrm>
+            <a:off x="5416905" y="1979675"/>
+            <a:ext cx="2926080" cy="223900"/>
+          </a:xfrm>
+          <a:prstGeom prst="rect">
+            <a:avLst/>
+          </a:prstGeom>
+          <a:noFill/>
+          <a:effectLst/>
+        </p:spPr>
+        <p:txBody>
+          <a:bodyPr wrap="none" lIns="18288" rIns="18288" tIns="18288" bIns="18288" anchor="t">
+            <a:spAutoFit/>
+          </a:bodyPr>
+          <a:lstStyle/>
+          <a:p>
+            <a:pPr algn="l">
+              <a:spcAft>
+                <a:spcPts val="0"/>
+              </a:spcAft>
+            </a:pPr>
+            <a:r>
+              <a:rPr sz="1150" b="0" i="0">
+                <a:solidFill>
+                  <a:srgbClr val="F2B880"/>
+                </a:solidFill>
+                <a:latin typeface="Arial"/>
+              </a:rPr>
+              <a:t>quadratic 8πG_g R_ref δR²</a:t>
+            </a:r>
+          </a:p>
+        </p:txBody>
+      </p:sp>
+      <p:sp>
+        <p:nvSpPr>
+          <p:cNvPr id="63" name="A-E08 round_rect 61" descr="sci-ppt:o061"/>
+          <p:cNvSpPr/>
+          <p:nvPr/>
+        </p:nvSpPr>
+        <p:spPr>
+          <a:xfrm>
+            <a:off x="8778240" y="1371600"/>
+            <a:ext cx="3063240" cy="3474720"/>
+          </a:xfrm>
+          <a:prstGeom prst="roundRect">
+            <a:avLst/>
+          </a:prstGeom>
+          <a:solidFill>
+            <a:srgbClr val="213E4B"/>
+          </a:solidFill>
+          <a:ln w="20320">
+            <a:solidFill>
+              <a:srgbClr val="8EDBD4"/>
+            </a:solidFill>
+          </a:ln>
+          <a:effectLst/>
+        </p:spPr>
+        <p:txBody>
+          <a:bodyPr rtlCol="0" anchor="ctr"/>
+          <a:lstStyle/>
+          <a:p>
+            <a:pPr algn="ctr"/>
+          </a:p>
+        </p:txBody>
+      </p:sp>
+      <p:sp>
+        <p:nvSpPr>
+          <p:cNvPr id="64" name="A-E08 text 62" descr="sci-ppt:o062"/>
+          <p:cNvSpPr txBox="1"/>
+          <p:nvPr/>
+        </p:nvSpPr>
+        <p:spPr>
+          <a:xfrm>
+            <a:off x="8887967" y="1426464"/>
+            <a:ext cx="2843784" cy="247142"/>
+          </a:xfrm>
+          <a:prstGeom prst="rect">
+            <a:avLst/>
+          </a:prstGeom>
+          <a:noFill/>
+          <a:effectLst/>
+        </p:spPr>
+        <p:txBody>
+          <a:bodyPr wrap="none" lIns="18288" rIns="18288" tIns="18288" bIns="18288" anchor="t">
+            <a:spAutoFit/>
+          </a:bodyPr>
+          <a:lstStyle/>
+          <a:p>
+            <a:pPr algn="l">
+              <a:spcAft>
+                <a:spcPts val="0"/>
+              </a:spcAft>
+            </a:pPr>
+            <a:r>
+              <a:rPr sz="1300" b="1" i="0">
+                <a:solidFill>
+                  <a:srgbClr val="8EDBD4"/>
+                </a:solidFill>
+                <a:latin typeface="Arial"/>
+              </a:rPr>
+              <a:t>Work conjugacy</a:t>
+            </a:r>
+          </a:p>
+        </p:txBody>
+      </p:sp>
+      <p:sp>
+        <p:nvSpPr>
+          <p:cNvPr id="65" name="A-E08 text 63" descr="sci-ppt:o063"/>
+          <p:cNvSpPr txBox="1"/>
+          <p:nvPr/>
+        </p:nvSpPr>
+        <p:spPr>
+          <a:xfrm>
+            <a:off x="8869680" y="1828800"/>
+            <a:ext cx="2880360" cy="231648"/>
+          </a:xfrm>
+          <a:prstGeom prst="rect">
+            <a:avLst/>
+          </a:prstGeom>
+          <a:noFill/>
+          <a:effectLst/>
+        </p:spPr>
+        <p:txBody>
+          <a:bodyPr wrap="none" lIns="18288" rIns="18288" tIns="18288" bIns="18288" anchor="t">
+            <a:spAutoFit/>
+          </a:bodyPr>
+          <a:lstStyle/>
+          <a:p>
+            <a:pPr algn="l">
+              <a:spcAft>
+                <a:spcPts val="0"/>
+              </a:spcAft>
+            </a:pPr>
+            <a:r>
+              <a:rPr sz="1200" b="1" i="0">
                 <a:solidFill>
                   <a:srgbClr val="E7F0F3"/>
                 </a:solidFill>
                 <a:latin typeface="Arial"/>
               </a:rPr>
-              <a:t>r</a:t>
-            </a:r>
-          </a:p>
-        </p:txBody>
-      </p:sp>
-      <p:cxnSp>
-        <p:nvCxnSpPr>
-          <p:cNvPr id="15" name="arrow 13" descr="sci-ppt:obj-013"/>
-          <p:cNvCxnSpPr/>
-          <p:nvPr/>
-        </p:nvCxnSpPr>
-        <p:spPr>
-          <a:xfrm>
-            <a:off x="2697480" y="1645920"/>
-            <a:ext cx="1691640" cy="0"/>
-          </a:xfrm>
-          <a:prstGeom prst="line">
-            <a:avLst/>
-          </a:prstGeom>
-          <a:ln w="21590">
-            <a:solidFill>
-              <a:srgbClr val="8EDBD4"/>
-            </a:solidFill>
-            <a:headEnd type="none" w="med" len="med"/>
-            <a:tailEnd type="triangle" w="med" len="med"/>
-          </a:ln>
-          <a:effectLst/>
-        </p:spPr>
-      </p:cxnSp>
-      <p:sp>
-        <p:nvSpPr>
-          <p:cNvPr id="16" name="text 14" descr="sci-ppt:obj-014"/>
+              <a:t>dW_g/dR = 4πR² pₑₗ</a:t>
+            </a:r>
+          </a:p>
+        </p:txBody>
+      </p:sp>
+      <p:sp>
+        <p:nvSpPr>
+          <p:cNvPr id="66" name="A-E08 text 64" descr="sci-ppt:o064"/>
           <p:cNvSpPr txBox="1"/>
           <p:nvPr/>
         </p:nvSpPr>
         <p:spPr>
           <a:xfrm>
-            <a:off x="2834640" y="1143000"/>
-            <a:ext cx="2286000" cy="310896"/>
+            <a:off x="8869680" y="2423160"/>
+            <a:ext cx="2880360" cy="231648"/>
           </a:xfrm>
           <a:prstGeom prst="rect">
             <a:avLst/>
@@ -3558,7 +6248,7 @@
           <a:effectLst/>
         </p:spPr>
         <p:txBody>
-          <a:bodyPr wrap="none" lIns="0" rIns="0" tIns="0" bIns="0" anchor="ctr">
+          <a:bodyPr wrap="none" lIns="18288" rIns="18288" tIns="18288" bIns="18288" anchor="t">
             <a:spAutoFit/>
           </a:bodyPr>
           <a:lstStyle/>
@@ -3569,27 +6259,147 @@
               </a:spcAft>
             </a:pPr>
             <a:r>
-              <a:rPr sz="1296" b="0" i="0">
+              <a:rPr sz="1200" b="1" i="0">
+                <a:solidFill>
+                  <a:srgbClr val="F2B880"/>
+                </a:solidFill>
+                <a:latin typeface="Arial"/>
+              </a:rPr>
+              <a:t>pₑₗ ≈ 4G_g δR/R_ref</a:t>
+            </a:r>
+          </a:p>
+        </p:txBody>
+      </p:sp>
+      <p:sp>
+        <p:nvSpPr>
+          <p:cNvPr id="67" name="A-E08 text 65" descr="sci-ppt:o065"/>
+          <p:cNvSpPr txBox="1"/>
+          <p:nvPr/>
+        </p:nvSpPr>
+        <p:spPr>
+          <a:xfrm>
+            <a:off x="8869680" y="3017520"/>
+            <a:ext cx="2880360" cy="231648"/>
+          </a:xfrm>
+          <a:prstGeom prst="rect">
+            <a:avLst/>
+          </a:prstGeom>
+          <a:noFill/>
+          <a:effectLst/>
+        </p:spPr>
+        <p:txBody>
+          <a:bodyPr wrap="none" lIns="18288" rIns="18288" tIns="18288" bIns="18288" anchor="t">
+            <a:spAutoFit/>
+          </a:bodyPr>
+          <a:lstStyle/>
+          <a:p>
+            <a:pPr algn="l">
+              <a:spcAft>
+                <a:spcPts val="0"/>
+              </a:spcAft>
+            </a:pPr>
+            <a:r>
+              <a:rPr sz="1200" b="1" i="0">
+                <a:solidFill>
+                  <a:srgbClr val="F2B880"/>
+                </a:solidFill>
+                <a:latin typeface="Arial"/>
+              </a:rPr>
+              <a:t>W_g ≈ 8πG_g R_ref δR²</a:t>
+            </a:r>
+          </a:p>
+        </p:txBody>
+      </p:sp>
+      <p:sp>
+        <p:nvSpPr>
+          <p:cNvPr id="68" name="A-E08 text 66" descr="sci-ppt:o066"/>
+          <p:cNvSpPr txBox="1"/>
+          <p:nvPr/>
+        </p:nvSpPr>
+        <p:spPr>
+          <a:xfrm>
+            <a:off x="8869680" y="3657600"/>
+            <a:ext cx="2880360" cy="223900"/>
+          </a:xfrm>
+          <a:prstGeom prst="rect">
+            <a:avLst/>
+          </a:prstGeom>
+          <a:noFill/>
+          <a:effectLst/>
+        </p:spPr>
+        <p:txBody>
+          <a:bodyPr wrap="none" lIns="18288" rIns="18288" tIns="18288" bIns="18288" anchor="t">
+            <a:spAutoFit/>
+          </a:bodyPr>
+          <a:lstStyle/>
+          <a:p>
+            <a:pPr algn="l">
+              <a:spcAft>
+                <a:spcPts val="0"/>
+              </a:spcAft>
+            </a:pPr>
+            <a:r>
+              <a:rPr sz="1150" b="0" i="0">
+                <a:solidFill>
+                  <a:srgbClr val="B4C7D2"/>
+                </a:solidFill>
+                <a:latin typeface="Arial"/>
+              </a:rPr>
+              <a:t>Linear pressure, quadratic work.</a:t>
+            </a:r>
+          </a:p>
+        </p:txBody>
+      </p:sp>
+      <p:sp>
+        <p:nvSpPr>
+          <p:cNvPr id="69" name="A-E08 text 67" descr="sci-ppt:o067"/>
+          <p:cNvSpPr txBox="1"/>
+          <p:nvPr/>
+        </p:nvSpPr>
+        <p:spPr>
+          <a:xfrm>
+            <a:off x="914400" y="5486400"/>
+            <a:ext cx="10972800" cy="239395"/>
+          </a:xfrm>
+          <a:prstGeom prst="rect">
+            <a:avLst/>
+          </a:prstGeom>
+          <a:noFill/>
+          <a:effectLst/>
+        </p:spPr>
+        <p:txBody>
+          <a:bodyPr wrap="none" lIns="18288" rIns="18288" tIns="18288" bIns="18288" anchor="t">
+            <a:spAutoFit/>
+          </a:bodyPr>
+          <a:lstStyle/>
+          <a:p>
+            <a:pPr algn="l">
+              <a:spcAft>
+                <a:spcPts val="0"/>
+              </a:spcAft>
+            </a:pPr>
+            <a:r>
+              <a:rPr sz="1250" b="0" i="0">
                 <a:solidFill>
                   <a:srgbClr val="E7F0F3"/>
                 </a:solidFill>
                 <a:latin typeface="Arial"/>
               </a:rPr>
-              <a:t>Material map</a:t>
-            </a:r>
-          </a:p>
-        </p:txBody>
-      </p:sp>
-      <p:sp>
-        <p:nvSpPr>
-          <p:cNvPr id="17" name="text 15" descr="sci-ppt:obj-015"/>
+              <a:t>The dashed small-deformation laws are tangent to the exact curves at δR = 0 and drift away only as the stretch grows.</a:t>
+            </a:r>
+          </a:p>
+        </p:txBody>
+      </p:sp>
+      <p:sp>
+        <p:nvSpPr>
+          <p:cNvPr id="70" name="A-E08 text 68" descr="sci-ppt:o068"/>
           <p:cNvSpPr txBox="1"/>
           <p:nvPr/>
         </p:nvSpPr>
         <p:spPr>
           <a:xfrm>
-            <a:off x="1005840" y="2578608"/>
-            <a:ext cx="2286000" cy="310896"/>
+            <a:off x="320040" y="6510528"/>
+            <a:ext cx="11521440" cy="200660"/>
           </a:xfrm>
           <a:prstGeom prst="rect">
             <a:avLst/>
@@ -3598,7 +6408,7 @@
           <a:effectLst/>
         </p:spPr>
         <p:txBody>
-          <a:bodyPr wrap="none" lIns="0" rIns="0" tIns="0" bIns="0" anchor="ctr">
+          <a:bodyPr wrap="none" lIns="18288" rIns="18288" tIns="18288" bIns="18288" anchor="t">
             <a:spAutoFit/>
           </a:bodyPr>
           <a:lstStyle/>
@@ -3609,573 +6419,13 @@
               </a:spcAft>
             </a:pPr>
             <a:r>
-              <a:rPr sz="1296" b="0" i="0">
+              <a:rPr sz="1000" b="0" i="0">
                 <a:solidFill>
-                  <a:srgbClr val="E7F0F3"/>
+                  <a:srgbClr val="B4C7D2"/>
                 </a:solidFill>
                 <a:latin typeface="Arial"/>
               </a:rPr>
-              <a:t>Reference</a:t>
-            </a:r>
-          </a:p>
-        </p:txBody>
-      </p:sp>
-      <p:sp>
-        <p:nvSpPr>
-          <p:cNvPr id="18" name="text 16" descr="sci-ppt:obj-016"/>
-          <p:cNvSpPr txBox="1"/>
-          <p:nvPr/>
-        </p:nvSpPr>
-        <p:spPr>
-          <a:xfrm>
-            <a:off x="4846320" y="2660904"/>
-            <a:ext cx="3383280" cy="310896"/>
-          </a:xfrm>
-          <a:prstGeom prst="rect">
-            <a:avLst/>
-          </a:prstGeom>
-          <a:noFill/>
-          <a:effectLst/>
-        </p:spPr>
-        <p:txBody>
-          <a:bodyPr wrap="none" lIns="0" rIns="0" tIns="0" bIns="0" anchor="ctr">
-            <a:spAutoFit/>
-          </a:bodyPr>
-          <a:lstStyle/>
-          <a:p>
-            <a:pPr algn="l">
-              <a:spcAft>
-                <a:spcPts val="0"/>
-              </a:spcAft>
-            </a:pPr>
-            <a:r>
-              <a:rPr sz="1296" b="0" i="0">
-                <a:solidFill>
-                  <a:srgbClr val="E7F0F3"/>
-                </a:solidFill>
-                <a:latin typeface="Arial"/>
-              </a:rPr>
-              <a:t>Deformed: λr , λθ</a:t>
-            </a:r>
-          </a:p>
-        </p:txBody>
-      </p:sp>
-      <p:sp>
-        <p:nvSpPr>
-          <p:cNvPr id="19" name="text 17" descr="sci-ppt:obj-017"/>
-          <p:cNvSpPr txBox="1"/>
-          <p:nvPr/>
-        </p:nvSpPr>
-        <p:spPr>
-          <a:xfrm>
-            <a:off x="6839712" y="777240"/>
-            <a:ext cx="1645920" cy="310896"/>
-          </a:xfrm>
-          <a:prstGeom prst="rect">
-            <a:avLst/>
-          </a:prstGeom>
-          <a:noFill/>
-          <a:effectLst/>
-        </p:spPr>
-        <p:txBody>
-          <a:bodyPr wrap="none" lIns="0" rIns="0" tIns="0" bIns="0" anchor="ctr">
-            <a:spAutoFit/>
-          </a:bodyPr>
-          <a:lstStyle/>
-          <a:p>
-            <a:pPr algn="l">
-              <a:spcAft>
-                <a:spcPts val="0"/>
-              </a:spcAft>
-            </a:pPr>
-            <a:r>
-              <a:rPr sz="1296" b="0" i="0">
-                <a:solidFill>
-                  <a:srgbClr val="E7F0F3"/>
-                </a:solidFill>
-                <a:latin typeface="Arial"/>
-              </a:rPr>
-              <a:t>Gg , ηg</a:t>
-            </a:r>
-          </a:p>
-        </p:txBody>
-      </p:sp>
-      <p:sp>
-        <p:nvSpPr>
-          <p:cNvPr id="20" name="text 18" descr="sci-ppt:obj-018"/>
-          <p:cNvSpPr txBox="1"/>
-          <p:nvPr/>
-        </p:nvSpPr>
-        <p:spPr>
-          <a:xfrm>
-            <a:off x="6839712" y="1207008"/>
-            <a:ext cx="1828800" cy="310896"/>
-          </a:xfrm>
-          <a:prstGeom prst="rect">
-            <a:avLst/>
-          </a:prstGeom>
-          <a:noFill/>
-          <a:effectLst/>
-        </p:spPr>
-        <p:txBody>
-          <a:bodyPr wrap="none" lIns="0" rIns="0" tIns="0" bIns="0" anchor="ctr">
-            <a:spAutoFit/>
-          </a:bodyPr>
-          <a:lstStyle/>
-          <a:p>
-            <a:pPr algn="l">
-              <a:spcAft>
-                <a:spcPts val="0"/>
-              </a:spcAft>
-            </a:pPr>
-            <a:r>
-              <a:rPr sz="1296" b="0" i="0">
-                <a:solidFill>
-                  <a:srgbClr val="E7F0F3"/>
-                </a:solidFill>
-                <a:latin typeface="Arial"/>
-              </a:rPr>
-              <a:t>σrr , σθθ</a:t>
-            </a:r>
-          </a:p>
-        </p:txBody>
-      </p:sp>
-      <p:sp>
-        <p:nvSpPr>
-          <p:cNvPr id="21" name="text 19" descr="sci-ppt:obj-019"/>
-          <p:cNvSpPr txBox="1"/>
-          <p:nvPr/>
-        </p:nvSpPr>
-        <p:spPr>
-          <a:xfrm>
-            <a:off x="6839712" y="1645920"/>
-            <a:ext cx="1371600" cy="310896"/>
-          </a:xfrm>
-          <a:prstGeom prst="rect">
-            <a:avLst/>
-          </a:prstGeom>
-          <a:noFill/>
-          <a:effectLst/>
-        </p:spPr>
-        <p:txBody>
-          <a:bodyPr wrap="none" lIns="0" rIns="0" tIns="0" bIns="0" anchor="ctr">
-            <a:spAutoFit/>
-          </a:bodyPr>
-          <a:lstStyle/>
-          <a:p>
-            <a:pPr algn="l">
-              <a:spcAft>
-                <a:spcPts val="0"/>
-              </a:spcAft>
-            </a:pPr>
-            <a:r>
-              <a:rPr sz="1296" b="0" i="0">
-                <a:solidFill>
-                  <a:srgbClr val="E7F0F3"/>
-                </a:solidFill>
-                <a:latin typeface="Arial"/>
-              </a:rPr>
-              <a:t>p∞</a:t>
-            </a:r>
-          </a:p>
-        </p:txBody>
-      </p:sp>
-      <p:sp>
-        <p:nvSpPr>
-          <p:cNvPr id="22" name="text 20" descr="sci-ppt:obj-020"/>
-          <p:cNvSpPr txBox="1"/>
-          <p:nvPr/>
-        </p:nvSpPr>
-        <p:spPr>
-          <a:xfrm>
-            <a:off x="5266944" y="1682496"/>
-            <a:ext cx="822960" cy="310896"/>
-          </a:xfrm>
-          <a:prstGeom prst="rect">
-            <a:avLst/>
-          </a:prstGeom>
-          <a:noFill/>
-          <a:effectLst/>
-        </p:spPr>
-        <p:txBody>
-          <a:bodyPr wrap="none" lIns="0" rIns="0" tIns="0" bIns="0" anchor="ctr">
-            <a:spAutoFit/>
-          </a:bodyPr>
-          <a:lstStyle/>
-          <a:p>
-            <a:pPr algn="l">
-              <a:spcAft>
-                <a:spcPts val="0"/>
-              </a:spcAft>
-            </a:pPr>
-            <a:r>
-              <a:rPr sz="1296" b="0" i="0">
-                <a:solidFill>
-                  <a:srgbClr val="E7F0F3"/>
-                </a:solidFill>
-                <a:latin typeface="Arial"/>
-              </a:rPr>
-              <a:t>pb</a:t>
-            </a:r>
-          </a:p>
-        </p:txBody>
-      </p:sp>
-      <p:sp>
-        <p:nvSpPr>
-          <p:cNvPr id="23" name="text 21" descr="sci-ppt:obj-021"/>
-          <p:cNvSpPr txBox="1"/>
-          <p:nvPr/>
-        </p:nvSpPr>
-        <p:spPr>
-          <a:xfrm>
-            <a:off x="868680" y="2990088"/>
-            <a:ext cx="7772400" cy="310896"/>
-          </a:xfrm>
-          <a:prstGeom prst="rect">
-            <a:avLst/>
-          </a:prstGeom>
-          <a:noFill/>
-          <a:effectLst/>
-        </p:spPr>
-        <p:txBody>
-          <a:bodyPr wrap="none" lIns="0" rIns="0" tIns="0" bIns="0" anchor="ctr">
-            <a:spAutoFit/>
-          </a:bodyPr>
-          <a:lstStyle/>
-          <a:p>
-            <a:pPr algn="l">
-              <a:spcAft>
-                <a:spcPts val="0"/>
-              </a:spcAft>
-            </a:pPr>
-            <a:r>
-              <a:rPr sz="1152" b="0" i="0">
-                <a:solidFill>
-                  <a:srgbClr val="E7F0F3"/>
-                </a:solidFill>
-                <a:latin typeface="Arial"/>
-              </a:rPr>
-              <a:t>r₀³ − Rref³ = r³ − R³ ; radial coordinates point outward</a:t>
-            </a:r>
-          </a:p>
-        </p:txBody>
-      </p:sp>
-      <p:sp>
-        <p:nvSpPr>
-          <p:cNvPr id="24" name="text 22" descr="sci-ppt:obj-022"/>
-          <p:cNvSpPr txBox="1"/>
-          <p:nvPr/>
-        </p:nvSpPr>
-        <p:spPr>
-          <a:xfrm>
-            <a:off x="256032" y="3465576"/>
-            <a:ext cx="7315200" cy="310896"/>
-          </a:xfrm>
-          <a:prstGeom prst="rect">
-            <a:avLst/>
-          </a:prstGeom>
-          <a:noFill/>
-          <a:effectLst/>
-        </p:spPr>
-        <p:txBody>
-          <a:bodyPr wrap="none" lIns="0" rIns="0" tIns="0" bIns="0" anchor="ctr">
-            <a:spAutoFit/>
-          </a:bodyPr>
-          <a:lstStyle/>
-          <a:p>
-            <a:pPr algn="l">
-              <a:spcAft>
-                <a:spcPts val="0"/>
-              </a:spcAft>
-            </a:pPr>
-            <a:r>
-              <a:rPr sz="1296" b="0" i="0">
-                <a:solidFill>
-                  <a:srgbClr val="8EDBD4"/>
-                </a:solidFill>
-                <a:latin typeface="Arial"/>
-              </a:rPr>
-              <a:t>Variables and physical limits</a:t>
-            </a:r>
-          </a:p>
-        </p:txBody>
-      </p:sp>
-      <p:sp>
-        <p:nvSpPr>
-          <p:cNvPr id="25" name="text 23" descr="sci-ppt:obj-023"/>
-          <p:cNvSpPr txBox="1"/>
-          <p:nvPr/>
-        </p:nvSpPr>
-        <p:spPr>
-          <a:xfrm>
-            <a:off x="365760" y="3813048"/>
-            <a:ext cx="8412480" cy="310896"/>
-          </a:xfrm>
-          <a:prstGeom prst="rect">
-            <a:avLst/>
-          </a:prstGeom>
-          <a:noFill/>
-          <a:effectLst/>
-        </p:spPr>
-        <p:txBody>
-          <a:bodyPr wrap="none" lIns="0" rIns="0" tIns="0" bIns="0" anchor="ctr">
-            <a:spAutoFit/>
-          </a:bodyPr>
-          <a:lstStyle/>
-          <a:p>
-            <a:pPr algn="l">
-              <a:spcAft>
-                <a:spcPts val="0"/>
-              </a:spcAft>
-            </a:pPr>
-            <a:r>
-              <a:rPr sz="1152" b="0" i="0">
-                <a:solidFill>
-                  <a:srgbClr val="E7F0F3"/>
-                </a:solidFill>
-                <a:latin typeface="Arial"/>
-              </a:rPr>
-              <a:t>• δR = R−Rref</a:t>
-            </a:r>
-          </a:p>
-        </p:txBody>
-      </p:sp>
-      <p:sp>
-        <p:nvSpPr>
-          <p:cNvPr id="26" name="text 24" descr="sci-ppt:obj-024"/>
-          <p:cNvSpPr txBox="1"/>
-          <p:nvPr/>
-        </p:nvSpPr>
-        <p:spPr>
-          <a:xfrm>
-            <a:off x="365760" y="4023360"/>
-            <a:ext cx="8412480" cy="310896"/>
-          </a:xfrm>
-          <a:prstGeom prst="rect">
-            <a:avLst/>
-          </a:prstGeom>
-          <a:noFill/>
-          <a:effectLst/>
-        </p:spPr>
-        <p:txBody>
-          <a:bodyPr wrap="none" lIns="0" rIns="0" tIns="0" bIns="0" anchor="ctr">
-            <a:spAutoFit/>
-          </a:bodyPr>
-          <a:lstStyle/>
-          <a:p>
-            <a:pPr algn="l">
-              <a:spcAft>
-                <a:spcPts val="0"/>
-              </a:spcAft>
-            </a:pPr>
-            <a:r>
-              <a:rPr sz="1152" b="0" i="0">
-                <a:solidFill>
-                  <a:srgbClr val="E7F0F3"/>
-                </a:solidFill>
-                <a:latin typeface="Arial"/>
-              </a:rPr>
-              <a:t>• small δR: pel ∝ δR</a:t>
-            </a:r>
-          </a:p>
-        </p:txBody>
-      </p:sp>
-      <p:sp>
-        <p:nvSpPr>
-          <p:cNvPr id="27" name="text 25" descr="sci-ppt:obj-025"/>
-          <p:cNvSpPr txBox="1"/>
-          <p:nvPr/>
-        </p:nvSpPr>
-        <p:spPr>
-          <a:xfrm>
-            <a:off x="365760" y="4233672"/>
-            <a:ext cx="8412480" cy="310896"/>
-          </a:xfrm>
-          <a:prstGeom prst="rect">
-            <a:avLst/>
-          </a:prstGeom>
-          <a:noFill/>
-          <a:effectLst/>
-        </p:spPr>
-        <p:txBody>
-          <a:bodyPr wrap="none" lIns="0" rIns="0" tIns="0" bIns="0" anchor="ctr">
-            <a:spAutoFit/>
-          </a:bodyPr>
-          <a:lstStyle/>
-          <a:p>
-            <a:pPr algn="l">
-              <a:spcAft>
-                <a:spcPts val="0"/>
-              </a:spcAft>
-            </a:pPr>
-            <a:r>
-              <a:rPr sz="1152" b="0" i="0">
-                <a:solidFill>
-                  <a:srgbClr val="E7F0F3"/>
-                </a:solidFill>
-                <a:latin typeface="Arial"/>
-              </a:rPr>
-              <a:t>• Wg ∝ δR²</a:t>
-            </a:r>
-          </a:p>
-        </p:txBody>
-      </p:sp>
-      <p:sp>
-        <p:nvSpPr>
-          <p:cNvPr id="28" name="text 26" descr="sci-ppt:obj-026"/>
-          <p:cNvSpPr txBox="1"/>
-          <p:nvPr/>
-        </p:nvSpPr>
-        <p:spPr>
-          <a:xfrm>
-            <a:off x="365760" y="4443984"/>
-            <a:ext cx="8412480" cy="310896"/>
-          </a:xfrm>
-          <a:prstGeom prst="rect">
-            <a:avLst/>
-          </a:prstGeom>
-          <a:noFill/>
-          <a:effectLst/>
-        </p:spPr>
-        <p:txBody>
-          <a:bodyPr wrap="none" lIns="0" rIns="0" tIns="0" bIns="0" anchor="ctr">
-            <a:spAutoFit/>
-          </a:bodyPr>
-          <a:lstStyle/>
-          <a:p>
-            <a:pPr algn="l">
-              <a:spcAft>
-                <a:spcPts val="0"/>
-              </a:spcAft>
-            </a:pPr>
-            <a:r>
-              <a:rPr sz="1152" b="0" i="0">
-                <a:solidFill>
-                  <a:srgbClr val="E7F0F3"/>
-                </a:solidFill>
-                <a:latin typeface="Arial"/>
-              </a:rPr>
-              <a:t>• 4πR²pel = dWg/dR</a:t>
-            </a:r>
-          </a:p>
-        </p:txBody>
-      </p:sp>
-      <p:sp>
-        <p:nvSpPr>
-          <p:cNvPr id="29" name="text 27" descr="sci-ppt:obj-027"/>
-          <p:cNvSpPr txBox="1"/>
-          <p:nvPr/>
-        </p:nvSpPr>
-        <p:spPr>
-          <a:xfrm>
-            <a:off x="365760" y="4654296"/>
-            <a:ext cx="8412480" cy="310896"/>
-          </a:xfrm>
-          <a:prstGeom prst="rect">
-            <a:avLst/>
-          </a:prstGeom>
-          <a:noFill/>
-          <a:effectLst/>
-        </p:spPr>
-        <p:txBody>
-          <a:bodyPr wrap="none" lIns="0" rIns="0" tIns="0" bIns="0" anchor="ctr">
-            <a:spAutoFit/>
-          </a:bodyPr>
-          <a:lstStyle/>
-          <a:p>
-            <a:pPr algn="l">
-              <a:spcAft>
-                <a:spcPts val="0"/>
-              </a:spcAft>
-            </a:pPr>
-            <a:r>
-              <a:rPr sz="1152" b="0" i="0">
-                <a:solidFill>
-                  <a:srgbClr val="E7F0F3"/>
-                </a:solidFill>
-                <a:latin typeface="Arial"/>
-              </a:rPr>
-              <a:t>• Gg, O</a:t>
-            </a:r>
-          </a:p>
-        </p:txBody>
-      </p:sp>
-      <p:sp>
-        <p:nvSpPr>
-          <p:cNvPr id="30" name="text 28" descr="sci-ppt:obj-028"/>
-          <p:cNvSpPr txBox="1"/>
-          <p:nvPr/>
-        </p:nvSpPr>
-        <p:spPr>
-          <a:xfrm>
-            <a:off x="365760" y="4864608"/>
-            <a:ext cx="8412480" cy="310896"/>
-          </a:xfrm>
-          <a:prstGeom prst="rect">
-            <a:avLst/>
-          </a:prstGeom>
-          <a:noFill/>
-          <a:effectLst/>
-        </p:spPr>
-        <p:txBody>
-          <a:bodyPr wrap="none" lIns="0" rIns="0" tIns="0" bIns="0" anchor="ctr">
-            <a:spAutoFit/>
-          </a:bodyPr>
-          <a:lstStyle/>
-          <a:p>
-            <a:pPr algn="l">
-              <a:spcAft>
-                <a:spcPts val="0"/>
-              </a:spcAft>
-            </a:pPr>
-            <a:r>
-              <a:rPr sz="1152" b="0" i="0">
-                <a:solidFill>
-                  <a:srgbClr val="E7F0F3"/>
-                </a:solidFill>
-                <a:latin typeface="Arial"/>
-              </a:rPr>
-              <a:t>Zero reference work and zero initial slope</a:t>
-            </a:r>
-          </a:p>
-        </p:txBody>
-      </p:sp>
-      <p:sp>
-        <p:nvSpPr>
-          <p:cNvPr id="31" name="text 29" descr="sci-ppt:obj-029"/>
-          <p:cNvSpPr txBox="1"/>
-          <p:nvPr/>
-        </p:nvSpPr>
-        <p:spPr>
-          <a:xfrm>
-            <a:off x="365760" y="5074920"/>
-            <a:ext cx="8412480" cy="310896"/>
-          </a:xfrm>
-          <a:prstGeom prst="rect">
-            <a:avLst/>
-          </a:prstGeom>
-          <a:noFill/>
-          <a:effectLst/>
-        </p:spPr>
-        <p:txBody>
-          <a:bodyPr wrap="none" lIns="0" rIns="0" tIns="0" bIns="0" anchor="ctr">
-            <a:spAutoFit/>
-          </a:bodyPr>
-          <a:lstStyle/>
-          <a:p>
-            <a:pPr algn="l">
-              <a:spcAft>
-                <a:spcPts val="0"/>
-              </a:spcAft>
-            </a:pPr>
-            <a:r>
-              <a:rPr sz="1152" b="0" i="0">
-                <a:solidFill>
-                  <a:srgbClr val="E7F0F3"/>
-                </a:solidFill>
-                <a:latin typeface="Arial"/>
-              </a:rPr>
-              <a:t>Elastic energy is nonnegative for expansion</a:t>
+              <a:t>Work conjugacy and small-deformation limits of Eq. A-E08.</a:t>
             </a:r>
           </a:p>
         </p:txBody>
